--- a/slides/day_3/6_ensemble_learning.pptx
+++ b/slides/day_3/6_ensemble_learning.pptx
@@ -5,27 +5,34 @@
     <p:sldMasterId id="2147483648" r:id="rId1"/>
   </p:sldMasterIdLst>
   <p:notesMasterIdLst>
-    <p:notesMasterId r:id="rId17"/>
+    <p:notesMasterId r:id="rId24"/>
   </p:notesMasterIdLst>
   <p:handoutMasterIdLst>
-    <p:handoutMasterId r:id="rId18"/>
+    <p:handoutMasterId r:id="rId25"/>
   </p:handoutMasterIdLst>
   <p:sldIdLst>
-    <p:sldId id="257" r:id="rId2"/>
-    <p:sldId id="258" r:id="rId3"/>
-    <p:sldId id="273" r:id="rId4"/>
-    <p:sldId id="277" r:id="rId5"/>
-    <p:sldId id="275" r:id="rId6"/>
-    <p:sldId id="276" r:id="rId7"/>
-    <p:sldId id="278" r:id="rId8"/>
-    <p:sldId id="261" r:id="rId9"/>
-    <p:sldId id="262" r:id="rId10"/>
-    <p:sldId id="263" r:id="rId11"/>
-    <p:sldId id="264" r:id="rId12"/>
-    <p:sldId id="265" r:id="rId13"/>
-    <p:sldId id="266" r:id="rId14"/>
-    <p:sldId id="270" r:id="rId15"/>
-    <p:sldId id="272" r:id="rId16"/>
+    <p:sldId id="544" r:id="rId2"/>
+    <p:sldId id="257" r:id="rId3"/>
+    <p:sldId id="545" r:id="rId4"/>
+    <p:sldId id="273" r:id="rId5"/>
+    <p:sldId id="277" r:id="rId6"/>
+    <p:sldId id="562" r:id="rId7"/>
+    <p:sldId id="275" r:id="rId8"/>
+    <p:sldId id="276" r:id="rId9"/>
+    <p:sldId id="278" r:id="rId10"/>
+    <p:sldId id="261" r:id="rId11"/>
+    <p:sldId id="262" r:id="rId12"/>
+    <p:sldId id="263" r:id="rId13"/>
+    <p:sldId id="264" r:id="rId14"/>
+    <p:sldId id="265" r:id="rId15"/>
+    <p:sldId id="266" r:id="rId16"/>
+    <p:sldId id="270" r:id="rId17"/>
+    <p:sldId id="272" r:id="rId18"/>
+    <p:sldId id="563" r:id="rId19"/>
+    <p:sldId id="558" r:id="rId20"/>
+    <p:sldId id="559" r:id="rId21"/>
+    <p:sldId id="560" r:id="rId22"/>
+    <p:sldId id="561" r:id="rId23"/>
   </p:sldIdLst>
   <p:sldSz cx="12192000" cy="6858000"/>
   <p:notesSz cx="6797675" cy="9874250"/>
@@ -135,7 +142,7 @@
 <file path=ppt/revisionInfo.xml><?xml version="1.0" encoding="utf-8"?>
 <p1510:revInfo xmlns:a="http://schemas.openxmlformats.org/drawingml/2006/main" xmlns:r="http://schemas.openxmlformats.org/officeDocument/2006/relationships" xmlns:p1510="http://schemas.microsoft.com/office/powerpoint/2015/10/main">
   <p1510:revLst>
-    <p1510:client id="{4B4BE8EF-EE71-4AB5-B357-D0E88CAC869B}" v="41" dt="2024-11-24T10:19:14.110"/>
+    <p1510:client id="{B0AB833F-8D9E-4839-88D3-8AB18BE981AF}" v="7" dt="2026-03-03T17:43:09.415"/>
   </p1510:revLst>
 </p1510:revInfo>
 </file>
@@ -143,74 +150,270 @@
 <file path=ppt/changesInfos/changesInfo1.xml><?xml version="1.0" encoding="utf-8"?>
 <pc:chgInfo xmlns:a="http://schemas.openxmlformats.org/drawingml/2006/main" xmlns:r="http://schemas.openxmlformats.org/officeDocument/2006/relationships" xmlns:ac="http://schemas.microsoft.com/office/drawing/2013/main/command" xmlns:pc="http://schemas.microsoft.com/office/powerpoint/2013/main/command">
   <pc:docChgLst>
-    <pc:chgData name="Robbin Bouwmeester" userId="1dbfebabfc25a55a" providerId="LiveId" clId="{5852F325-2311-43D8-90C6-AEEAC74E8364}"/>
-    <pc:docChg chg="addSld delSld modSld">
-      <pc:chgData name="Robbin Bouwmeester" userId="1dbfebabfc25a55a" providerId="LiveId" clId="{5852F325-2311-43D8-90C6-AEEAC74E8364}" dt="2024-11-24T10:41:27.507" v="111" actId="1076"/>
+    <pc:chgData name="Robbin Bouwmeester" userId="1dbfebabfc25a55a" providerId="LiveId" clId="{75D63595-F797-482E-A4A0-2F4889B74D4F}"/>
+    <pc:docChg chg="custSel addSld delSld modSld sldOrd">
+      <pc:chgData name="Robbin Bouwmeester" userId="1dbfebabfc25a55a" providerId="LiveId" clId="{75D63595-F797-482E-A4A0-2F4889B74D4F}" dt="2026-03-03T17:43:28.941" v="119" actId="729"/>
       <pc:docMkLst>
         <pc:docMk/>
       </pc:docMkLst>
-      <pc:sldChg chg="del">
-        <pc:chgData name="Robbin Bouwmeester" userId="1dbfebabfc25a55a" providerId="LiveId" clId="{5852F325-2311-43D8-90C6-AEEAC74E8364}" dt="2024-11-24T10:36:13.516" v="54" actId="47"/>
+      <pc:sldChg chg="ord">
+        <pc:chgData name="Robbin Bouwmeester" userId="1dbfebabfc25a55a" providerId="LiveId" clId="{75D63595-F797-482E-A4A0-2F4889B74D4F}" dt="2026-03-03T13:51:54.600" v="3"/>
         <pc:sldMkLst>
           <pc:docMk/>
-          <pc:sldMk cId="3376430550" sldId="260"/>
+          <pc:sldMk cId="4071848948" sldId="257"/>
         </pc:sldMkLst>
       </pc:sldChg>
       <pc:sldChg chg="del">
-        <pc:chgData name="Robbin Bouwmeester" userId="1dbfebabfc25a55a" providerId="LiveId" clId="{5852F325-2311-43D8-90C6-AEEAC74E8364}" dt="2024-11-24T10:22:31.863" v="0" actId="47"/>
+        <pc:chgData name="Robbin Bouwmeester" userId="1dbfebabfc25a55a" providerId="LiveId" clId="{75D63595-F797-482E-A4A0-2F4889B74D4F}" dt="2026-03-03T14:06:21.887" v="7" actId="47"/>
         <pc:sldMkLst>
           <pc:docMk/>
-          <pc:sldMk cId="419804066" sldId="267"/>
+          <pc:sldMk cId="3933282328" sldId="258"/>
         </pc:sldMkLst>
       </pc:sldChg>
-      <pc:sldChg chg="del">
-        <pc:chgData name="Robbin Bouwmeester" userId="1dbfebabfc25a55a" providerId="LiveId" clId="{5852F325-2311-43D8-90C6-AEEAC74E8364}" dt="2024-11-24T10:22:31.863" v="0" actId="47"/>
+      <pc:sldChg chg="add del ord">
+        <pc:chgData name="Robbin Bouwmeester" userId="1dbfebabfc25a55a" providerId="LiveId" clId="{75D63595-F797-482E-A4A0-2F4889B74D4F}" dt="2026-03-03T17:35:35.512" v="12"/>
         <pc:sldMkLst>
           <pc:docMk/>
-          <pc:sldMk cId="1745475178" sldId="268"/>
+          <pc:sldMk cId="416481786" sldId="275"/>
         </pc:sldMkLst>
       </pc:sldChg>
-      <pc:sldChg chg="del">
-        <pc:chgData name="Robbin Bouwmeester" userId="1dbfebabfc25a55a" providerId="LiveId" clId="{5852F325-2311-43D8-90C6-AEEAC74E8364}" dt="2024-11-24T10:22:31.863" v="0" actId="47"/>
+      <pc:sldChg chg="delSp add mod">
+        <pc:chgData name="Robbin Bouwmeester" userId="1dbfebabfc25a55a" providerId="LiveId" clId="{75D63595-F797-482E-A4A0-2F4889B74D4F}" dt="2026-03-03T17:32:47.271" v="8" actId="478"/>
         <pc:sldMkLst>
           <pc:docMk/>
-          <pc:sldMk cId="1820715527" sldId="269"/>
+          <pc:sldMk cId="3754802310" sldId="544"/>
         </pc:sldMkLst>
+        <pc:spChg chg="del">
+          <ac:chgData name="Robbin Bouwmeester" userId="1dbfebabfc25a55a" providerId="LiveId" clId="{75D63595-F797-482E-A4A0-2F4889B74D4F}" dt="2026-03-03T17:32:47.271" v="8" actId="478"/>
+          <ac:spMkLst>
+            <pc:docMk/>
+            <pc:sldMk cId="3754802310" sldId="544"/>
+            <ac:spMk id="6" creationId="{915F9842-6503-F735-6B66-A608536A7C92}"/>
+          </ac:spMkLst>
+        </pc:spChg>
+        <pc:picChg chg="del">
+          <ac:chgData name="Robbin Bouwmeester" userId="1dbfebabfc25a55a" providerId="LiveId" clId="{75D63595-F797-482E-A4A0-2F4889B74D4F}" dt="2026-03-03T17:32:47.271" v="8" actId="478"/>
+          <ac:picMkLst>
+            <pc:docMk/>
+            <pc:sldMk cId="3754802310" sldId="544"/>
+            <ac:picMk id="7" creationId="{53EC4B9A-FCBD-2371-E5DA-82BDB5DF8B5E}"/>
+          </ac:picMkLst>
+        </pc:picChg>
+        <pc:cxnChg chg="del">
+          <ac:chgData name="Robbin Bouwmeester" userId="1dbfebabfc25a55a" providerId="LiveId" clId="{75D63595-F797-482E-A4A0-2F4889B74D4F}" dt="2026-03-03T17:32:47.271" v="8" actId="478"/>
+          <ac:cxnSpMkLst>
+            <pc:docMk/>
+            <pc:sldMk cId="3754802310" sldId="544"/>
+            <ac:cxnSpMk id="8" creationId="{27A51244-C806-A81D-B96E-A917EF6BE48C}"/>
+          </ac:cxnSpMkLst>
+        </pc:cxnChg>
       </pc:sldChg>
-      <pc:sldChg chg="del">
-        <pc:chgData name="Robbin Bouwmeester" userId="1dbfebabfc25a55a" providerId="LiveId" clId="{5852F325-2311-43D8-90C6-AEEAC74E8364}" dt="2024-11-24T10:22:31.863" v="0" actId="47"/>
+      <pc:sldChg chg="delSp add mod ord">
+        <pc:chgData name="Robbin Bouwmeester" userId="1dbfebabfc25a55a" providerId="LiveId" clId="{75D63595-F797-482E-A4A0-2F4889B74D4F}" dt="2026-03-03T17:39:06.592" v="41" actId="478"/>
         <pc:sldMkLst>
           <pc:docMk/>
-          <pc:sldMk cId="3516859904" sldId="271"/>
+          <pc:sldMk cId="3679395829" sldId="545"/>
         </pc:sldMkLst>
+        <pc:spChg chg="del">
+          <ac:chgData name="Robbin Bouwmeester" userId="1dbfebabfc25a55a" providerId="LiveId" clId="{75D63595-F797-482E-A4A0-2F4889B74D4F}" dt="2026-03-03T17:39:06.592" v="41" actId="478"/>
+          <ac:spMkLst>
+            <pc:docMk/>
+            <pc:sldMk cId="3679395829" sldId="545"/>
+            <ac:spMk id="6" creationId="{55A62B9C-FFF7-4FA6-F7E5-5E7EC06B0146}"/>
+          </ac:spMkLst>
+        </pc:spChg>
+        <pc:picChg chg="del">
+          <ac:chgData name="Robbin Bouwmeester" userId="1dbfebabfc25a55a" providerId="LiveId" clId="{75D63595-F797-482E-A4A0-2F4889B74D4F}" dt="2026-03-03T17:39:06.592" v="41" actId="478"/>
+          <ac:picMkLst>
+            <pc:docMk/>
+            <pc:sldMk cId="3679395829" sldId="545"/>
+            <ac:picMk id="7" creationId="{DFA6107F-6DBE-492E-DD16-F10B53448844}"/>
+          </ac:picMkLst>
+        </pc:picChg>
+        <pc:cxnChg chg="del">
+          <ac:chgData name="Robbin Bouwmeester" userId="1dbfebabfc25a55a" providerId="LiveId" clId="{75D63595-F797-482E-A4A0-2F4889B74D4F}" dt="2026-03-03T17:39:06.592" v="41" actId="478"/>
+          <ac:cxnSpMkLst>
+            <pc:docMk/>
+            <pc:sldMk cId="3679395829" sldId="545"/>
+            <ac:cxnSpMk id="8" creationId="{5F568E3F-6471-341E-9983-F52C2A194A17}"/>
+          </ac:cxnSpMkLst>
+        </pc:cxnChg>
       </pc:sldChg>
-      <pc:sldChg chg="addSp modSp mod">
-        <pc:chgData name="Robbin Bouwmeester" userId="1dbfebabfc25a55a" providerId="LiveId" clId="{5852F325-2311-43D8-90C6-AEEAC74E8364}" dt="2024-11-24T10:26:03.346" v="2" actId="1076"/>
+      <pc:sldChg chg="delSp add mod ord modShow">
+        <pc:chgData name="Robbin Bouwmeester" userId="1dbfebabfc25a55a" providerId="LiveId" clId="{75D63595-F797-482E-A4A0-2F4889B74D4F}" dt="2026-03-03T17:40:15.365" v="48"/>
         <pc:sldMkLst>
           <pc:docMk/>
-          <pc:sldMk cId="1548010638" sldId="272"/>
+          <pc:sldMk cId="419804066" sldId="558"/>
+        </pc:sldMkLst>
+        <pc:spChg chg="del">
+          <ac:chgData name="Robbin Bouwmeester" userId="1dbfebabfc25a55a" providerId="LiveId" clId="{75D63595-F797-482E-A4A0-2F4889B74D4F}" dt="2026-03-03T17:39:13.888" v="42" actId="478"/>
+          <ac:spMkLst>
+            <pc:docMk/>
+            <pc:sldMk cId="419804066" sldId="558"/>
+            <ac:spMk id="8" creationId="{691B2276-B739-8102-B354-45F58A864384}"/>
+          </ac:spMkLst>
+        </pc:spChg>
+        <pc:picChg chg="del">
+          <ac:chgData name="Robbin Bouwmeester" userId="1dbfebabfc25a55a" providerId="LiveId" clId="{75D63595-F797-482E-A4A0-2F4889B74D4F}" dt="2026-03-03T17:39:13.888" v="42" actId="478"/>
+          <ac:picMkLst>
+            <pc:docMk/>
+            <pc:sldMk cId="419804066" sldId="558"/>
+            <ac:picMk id="9" creationId="{9DA00D7E-731A-6893-3E19-AB585FF2D8DF}"/>
+          </ac:picMkLst>
+        </pc:picChg>
+        <pc:cxnChg chg="del">
+          <ac:chgData name="Robbin Bouwmeester" userId="1dbfebabfc25a55a" providerId="LiveId" clId="{75D63595-F797-482E-A4A0-2F4889B74D4F}" dt="2026-03-03T17:39:13.888" v="42" actId="478"/>
+          <ac:cxnSpMkLst>
+            <pc:docMk/>
+            <pc:sldMk cId="419804066" sldId="558"/>
+            <ac:cxnSpMk id="10" creationId="{D97F422E-E52C-9E67-7166-6D8C3E47783F}"/>
+          </ac:cxnSpMkLst>
+        </pc:cxnChg>
+      </pc:sldChg>
+      <pc:sldChg chg="delSp add mod ord modShow">
+        <pc:chgData name="Robbin Bouwmeester" userId="1dbfebabfc25a55a" providerId="LiveId" clId="{75D63595-F797-482E-A4A0-2F4889B74D4F}" dt="2026-03-03T17:40:15.365" v="48"/>
+        <pc:sldMkLst>
+          <pc:docMk/>
+          <pc:sldMk cId="3516859904" sldId="559"/>
+        </pc:sldMkLst>
+        <pc:spChg chg="del">
+          <ac:chgData name="Robbin Bouwmeester" userId="1dbfebabfc25a55a" providerId="LiveId" clId="{75D63595-F797-482E-A4A0-2F4889B74D4F}" dt="2026-03-03T17:39:17.012" v="43" actId="478"/>
+          <ac:spMkLst>
+            <pc:docMk/>
+            <pc:sldMk cId="3516859904" sldId="559"/>
+            <ac:spMk id="3" creationId="{A0181C8B-0289-DF35-D215-36FC9DDD6F09}"/>
+          </ac:spMkLst>
+        </pc:spChg>
+        <pc:picChg chg="del">
+          <ac:chgData name="Robbin Bouwmeester" userId="1dbfebabfc25a55a" providerId="LiveId" clId="{75D63595-F797-482E-A4A0-2F4889B74D4F}" dt="2026-03-03T17:39:17.012" v="43" actId="478"/>
+          <ac:picMkLst>
+            <pc:docMk/>
+            <pc:sldMk cId="3516859904" sldId="559"/>
+            <ac:picMk id="4" creationId="{A192C551-B038-3AED-EA52-6E10D6BE4105}"/>
+          </ac:picMkLst>
+        </pc:picChg>
+        <pc:cxnChg chg="del">
+          <ac:chgData name="Robbin Bouwmeester" userId="1dbfebabfc25a55a" providerId="LiveId" clId="{75D63595-F797-482E-A4A0-2F4889B74D4F}" dt="2026-03-03T17:39:17.012" v="43" actId="478"/>
+          <ac:cxnSpMkLst>
+            <pc:docMk/>
+            <pc:sldMk cId="3516859904" sldId="559"/>
+            <ac:cxnSpMk id="5" creationId="{A8D7B732-51DF-CDDA-1187-A628F547E2B3}"/>
+          </ac:cxnSpMkLst>
+        </pc:cxnChg>
+      </pc:sldChg>
+      <pc:sldChg chg="delSp add mod ord modShow">
+        <pc:chgData name="Robbin Bouwmeester" userId="1dbfebabfc25a55a" providerId="LiveId" clId="{75D63595-F797-482E-A4A0-2F4889B74D4F}" dt="2026-03-03T17:40:15.365" v="48"/>
+        <pc:sldMkLst>
+          <pc:docMk/>
+          <pc:sldMk cId="1745475178" sldId="560"/>
+        </pc:sldMkLst>
+        <pc:spChg chg="del">
+          <ac:chgData name="Robbin Bouwmeester" userId="1dbfebabfc25a55a" providerId="LiveId" clId="{75D63595-F797-482E-A4A0-2F4889B74D4F}" dt="2026-03-03T17:39:20.322" v="44" actId="478"/>
+          <ac:spMkLst>
+            <pc:docMk/>
+            <pc:sldMk cId="1745475178" sldId="560"/>
+            <ac:spMk id="5" creationId="{E42E5854-9610-0661-9284-84130CC79B97}"/>
+          </ac:spMkLst>
+        </pc:spChg>
+        <pc:picChg chg="del">
+          <ac:chgData name="Robbin Bouwmeester" userId="1dbfebabfc25a55a" providerId="LiveId" clId="{75D63595-F797-482E-A4A0-2F4889B74D4F}" dt="2026-03-03T17:39:20.322" v="44" actId="478"/>
+          <ac:picMkLst>
+            <pc:docMk/>
+            <pc:sldMk cId="1745475178" sldId="560"/>
+            <ac:picMk id="6" creationId="{64F4B138-5EB3-FF46-7941-83ABA4F4B89F}"/>
+          </ac:picMkLst>
+        </pc:picChg>
+        <pc:cxnChg chg="del">
+          <ac:chgData name="Robbin Bouwmeester" userId="1dbfebabfc25a55a" providerId="LiveId" clId="{75D63595-F797-482E-A4A0-2F4889B74D4F}" dt="2026-03-03T17:39:20.322" v="44" actId="478"/>
+          <ac:cxnSpMkLst>
+            <pc:docMk/>
+            <pc:sldMk cId="1745475178" sldId="560"/>
+            <ac:cxnSpMk id="8" creationId="{08B07758-42CB-25C2-4C19-F5B1B31AAD3B}"/>
+          </ac:cxnSpMkLst>
+        </pc:cxnChg>
+      </pc:sldChg>
+      <pc:sldChg chg="delSp add mod ord modShow">
+        <pc:chgData name="Robbin Bouwmeester" userId="1dbfebabfc25a55a" providerId="LiveId" clId="{75D63595-F797-482E-A4A0-2F4889B74D4F}" dt="2026-03-03T17:40:15.365" v="48"/>
+        <pc:sldMkLst>
+          <pc:docMk/>
+          <pc:sldMk cId="1820715527" sldId="561"/>
+        </pc:sldMkLst>
+        <pc:spChg chg="del">
+          <ac:chgData name="Robbin Bouwmeester" userId="1dbfebabfc25a55a" providerId="LiveId" clId="{75D63595-F797-482E-A4A0-2F4889B74D4F}" dt="2026-03-03T17:39:23.282" v="45" actId="478"/>
+          <ac:spMkLst>
+            <pc:docMk/>
+            <pc:sldMk cId="1820715527" sldId="561"/>
+            <ac:spMk id="5" creationId="{ACCE9259-9456-DB1A-4D08-861D6E856E47}"/>
+          </ac:spMkLst>
+        </pc:spChg>
+        <pc:picChg chg="del">
+          <ac:chgData name="Robbin Bouwmeester" userId="1dbfebabfc25a55a" providerId="LiveId" clId="{75D63595-F797-482E-A4A0-2F4889B74D4F}" dt="2026-03-03T17:39:23.282" v="45" actId="478"/>
+          <ac:picMkLst>
+            <pc:docMk/>
+            <pc:sldMk cId="1820715527" sldId="561"/>
+            <ac:picMk id="6" creationId="{8805ACB0-ACDA-4DF5-87BE-66909AFB9495}"/>
+          </ac:picMkLst>
+        </pc:picChg>
+        <pc:cxnChg chg="del">
+          <ac:chgData name="Robbin Bouwmeester" userId="1dbfebabfc25a55a" providerId="LiveId" clId="{75D63595-F797-482E-A4A0-2F4889B74D4F}" dt="2026-03-03T17:39:23.282" v="45" actId="478"/>
+          <ac:cxnSpMkLst>
+            <pc:docMk/>
+            <pc:sldMk cId="1820715527" sldId="561"/>
+            <ac:cxnSpMk id="7" creationId="{85C01C1F-AD0F-D9CD-BBD2-34FA96B4E554}"/>
+          </ac:cxnSpMkLst>
+        </pc:cxnChg>
+      </pc:sldChg>
+      <pc:sldChg chg="addSp modSp add mod">
+        <pc:chgData name="Robbin Bouwmeester" userId="1dbfebabfc25a55a" providerId="LiveId" clId="{75D63595-F797-482E-A4A0-2F4889B74D4F}" dt="2026-03-03T17:36:49.960" v="40" actId="13822"/>
+        <pc:sldMkLst>
+          <pc:docMk/>
+          <pc:sldMk cId="3531563971" sldId="562"/>
         </pc:sldMkLst>
         <pc:spChg chg="add mod">
-          <ac:chgData name="Robbin Bouwmeester" userId="1dbfebabfc25a55a" providerId="LiveId" clId="{5852F325-2311-43D8-90C6-AEEAC74E8364}" dt="2024-11-24T10:26:03.346" v="2" actId="1076"/>
+          <ac:chgData name="Robbin Bouwmeester" userId="1dbfebabfc25a55a" providerId="LiveId" clId="{75D63595-F797-482E-A4A0-2F4889B74D4F}" dt="2026-03-03T17:36:24.242" v="20" actId="208"/>
           <ac:spMkLst>
             <pc:docMk/>
-            <pc:sldMk cId="1548010638" sldId="272"/>
-            <ac:spMk id="5" creationId="{E82FD8A4-8563-78B7-3318-05DC4D6C319C}"/>
+            <pc:sldMk cId="3531563971" sldId="562"/>
+            <ac:spMk id="2" creationId="{FDFD6532-F626-F555-6003-0D243397DC53}"/>
           </ac:spMkLst>
         </pc:spChg>
+        <pc:spChg chg="add mod">
+          <ac:chgData name="Robbin Bouwmeester" userId="1dbfebabfc25a55a" providerId="LiveId" clId="{75D63595-F797-482E-A4A0-2F4889B74D4F}" dt="2026-03-03T17:36:44.916" v="38" actId="1076"/>
+          <ac:spMkLst>
+            <pc:docMk/>
+            <pc:sldMk cId="3531563971" sldId="562"/>
+            <ac:spMk id="3" creationId="{733E7AF2-6C7E-CF01-12F1-7F840A758478}"/>
+          </ac:spMkLst>
+        </pc:spChg>
+        <pc:picChg chg="mod modCrop">
+          <ac:chgData name="Robbin Bouwmeester" userId="1dbfebabfc25a55a" providerId="LiveId" clId="{75D63595-F797-482E-A4A0-2F4889B74D4F}" dt="2026-03-03T17:36:01.436" v="14" actId="732"/>
+          <ac:picMkLst>
+            <pc:docMk/>
+            <pc:sldMk cId="3531563971" sldId="562"/>
+            <ac:picMk id="6" creationId="{E835276C-B480-20F7-1B45-9955A9F2B239}"/>
+          </ac:picMkLst>
+        </pc:picChg>
+        <pc:cxnChg chg="add mod">
+          <ac:chgData name="Robbin Bouwmeester" userId="1dbfebabfc25a55a" providerId="LiveId" clId="{75D63595-F797-482E-A4A0-2F4889B74D4F}" dt="2026-03-03T17:36:49.960" v="40" actId="13822"/>
+          <ac:cxnSpMkLst>
+            <pc:docMk/>
+            <pc:sldMk cId="3531563971" sldId="562"/>
+            <ac:cxnSpMk id="7" creationId="{2BA99BA1-86C3-FADD-41C0-29C02CDD9027}"/>
+          </ac:cxnSpMkLst>
+        </pc:cxnChg>
       </pc:sldChg>
-      <pc:sldChg chg="modSp add mod">
-        <pc:chgData name="Robbin Bouwmeester" userId="1dbfebabfc25a55a" providerId="LiveId" clId="{5852F325-2311-43D8-90C6-AEEAC74E8364}" dt="2024-11-24T10:41:27.507" v="111" actId="1076"/>
+      <pc:sldChg chg="addSp modSp new mod modShow">
+        <pc:chgData name="Robbin Bouwmeester" userId="1dbfebabfc25a55a" providerId="LiveId" clId="{75D63595-F797-482E-A4A0-2F4889B74D4F}" dt="2026-03-03T17:43:28.941" v="119" actId="729"/>
         <pc:sldMkLst>
           <pc:docMk/>
-          <pc:sldMk cId="4034051223" sldId="278"/>
+          <pc:sldMk cId="3436499605" sldId="563"/>
         </pc:sldMkLst>
-        <pc:spChg chg="mod">
-          <ac:chgData name="Robbin Bouwmeester" userId="1dbfebabfc25a55a" providerId="LiveId" clId="{5852F325-2311-43D8-90C6-AEEAC74E8364}" dt="2024-11-24T10:41:27.507" v="111" actId="1076"/>
+        <pc:spChg chg="add mod">
+          <ac:chgData name="Robbin Bouwmeester" userId="1dbfebabfc25a55a" providerId="LiveId" clId="{75D63595-F797-482E-A4A0-2F4889B74D4F}" dt="2026-03-03T17:43:26.441" v="118" actId="20577"/>
           <ac:spMkLst>
             <pc:docMk/>
-            <pc:sldMk cId="4034051223" sldId="278"/>
-            <ac:spMk id="4" creationId="{74850351-B665-1124-9850-141925650539}"/>
+            <pc:sldMk cId="3436499605" sldId="563"/>
+            <ac:spMk id="2" creationId="{FF285DFA-A873-EAEE-E801-AD6394974CF6}"/>
           </ac:spMkLst>
         </pc:spChg>
       </pc:sldChg>
@@ -301,7 +504,7 @@
           <a:p>
             <a:fld id="{3C10CED3-9D38-496E-A0C9-F8629E5A2A41}" type="datetimeFigureOut">
               <a:rPr lang="en-US" smtClean="0"/>
-              <a:t>11/24/2024</a:t>
+              <a:t>3/3/2026</a:t>
             </a:fld>
             <a:endParaRPr lang="en-US"/>
           </a:p>
@@ -466,7 +669,7 @@
           <a:p>
             <a:fld id="{566A7747-0984-4E12-9222-F6AC1BF9321E}" type="datetimeFigureOut">
               <a:rPr lang="en-US" smtClean="0"/>
-              <a:t>11/24/2024</a:t>
+              <a:t>3/3/2026</a:t>
             </a:fld>
             <a:endParaRPr lang="en-US"/>
           </a:p>
@@ -738,7 +941,13 @@
   <p:cSld>
     <p:spTree>
       <p:nvGrpSpPr>
-        <p:cNvPr id="1" name=""/>
+        <p:cNvPr id="1" name="">
+          <a:extLst>
+            <a:ext uri="{FF2B5EF4-FFF2-40B4-BE49-F238E27FC236}">
+              <a16:creationId xmlns:a16="http://schemas.microsoft.com/office/drawing/2014/main" id="{83FAD755-1991-F944-37FC-7DE901259CA4}"/>
+            </a:ext>
+          </a:extLst>
+        </p:cNvPr>
         <p:cNvGrpSpPr/>
         <p:nvPr/>
       </p:nvGrpSpPr>
@@ -752,7 +961,13 @@
       </p:grpSpPr>
       <p:sp>
         <p:nvSpPr>
-          <p:cNvPr id="2" name="Slide Image Placeholder 1"/>
+          <p:cNvPr id="2" name="Slide Image Placeholder 1">
+            <a:extLst>
+              <a:ext uri="{FF2B5EF4-FFF2-40B4-BE49-F238E27FC236}">
+                <a16:creationId xmlns:a16="http://schemas.microsoft.com/office/drawing/2014/main" id="{9D825A46-5B97-8F30-D6DC-81B17E20C565}"/>
+              </a:ext>
+            </a:extLst>
+          </p:cNvPr>
           <p:cNvSpPr>
             <a:spLocks noGrp="1" noRot="1" noChangeAspect="1"/>
           </p:cNvSpPr>
@@ -764,7 +979,13 @@
       </p:sp>
       <p:sp>
         <p:nvSpPr>
-          <p:cNvPr id="3" name="Notes Placeholder 2"/>
+          <p:cNvPr id="3" name="Notes Placeholder 2">
+            <a:extLst>
+              <a:ext uri="{FF2B5EF4-FFF2-40B4-BE49-F238E27FC236}">
+                <a16:creationId xmlns:a16="http://schemas.microsoft.com/office/drawing/2014/main" id="{ECE2F65C-FC5B-75F3-B281-8A2000A6BE1A}"/>
+              </a:ext>
+            </a:extLst>
+          </p:cNvPr>
           <p:cNvSpPr>
             <a:spLocks noGrp="1"/>
           </p:cNvSpPr>
@@ -783,7 +1004,13 @@
       </p:sp>
       <p:sp>
         <p:nvSpPr>
-          <p:cNvPr id="4" name="Slide Number Placeholder 3"/>
+          <p:cNvPr id="4" name="Slide Number Placeholder 3">
+            <a:extLst>
+              <a:ext uri="{FF2B5EF4-FFF2-40B4-BE49-F238E27FC236}">
+                <a16:creationId xmlns:a16="http://schemas.microsoft.com/office/drawing/2014/main" id="{D700E7F8-C154-CD4A-5AC7-8692B1AAF59F}"/>
+              </a:ext>
+            </a:extLst>
+          </p:cNvPr>
           <p:cNvSpPr>
             <a:spLocks noGrp="1"/>
           </p:cNvSpPr>
@@ -807,7 +1034,7 @@
     </p:spTree>
     <p:extLst>
       <p:ext uri="{BB962C8B-B14F-4D97-AF65-F5344CB8AC3E}">
-        <p14:creationId xmlns:p14="http://schemas.microsoft.com/office/powerpoint/2010/main" val="4111050408"/>
+        <p14:creationId xmlns:p14="http://schemas.microsoft.com/office/powerpoint/2010/main" val="1116263048"/>
       </p:ext>
     </p:extLst>
   </p:cSld>
@@ -861,7 +1088,7 @@
           <a:bodyPr/>
           <a:lstStyle/>
           <a:p>
-            <a:endParaRPr lang="LID4096" dirty="0"/>
+            <a:endParaRPr lang="en-US" dirty="0"/>
           </a:p>
         </p:txBody>
       </p:sp>
@@ -872,7 +1099,7 @@
             <a:spLocks noGrp="1"/>
           </p:cNvSpPr>
           <p:nvPr>
-            <p:ph type="sldNum" sz="quarter" idx="5"/>
+            <p:ph type="sldNum" sz="quarter" idx="10"/>
           </p:nvPr>
         </p:nvSpPr>
         <p:spPr/>
@@ -882,7 +1109,91 @@
           <a:p>
             <a:fld id="{E36C4827-840E-4EC5-B0B2-4EAAD02724FF}" type="slidenum">
               <a:rPr lang="en-US" smtClean="0"/>
-              <a:t>15</a:t>
+              <a:t>16</a:t>
+            </a:fld>
+            <a:endParaRPr lang="en-US"/>
+          </a:p>
+        </p:txBody>
+      </p:sp>
+    </p:spTree>
+    <p:extLst>
+      <p:ext uri="{BB962C8B-B14F-4D97-AF65-F5344CB8AC3E}">
+        <p14:creationId xmlns:p14="http://schemas.microsoft.com/office/powerpoint/2010/main" val="994736307"/>
+      </p:ext>
+    </p:extLst>
+  </p:cSld>
+  <p:clrMapOvr>
+    <a:masterClrMapping/>
+  </p:clrMapOvr>
+</p:notes>
+</file>
+
+<file path=ppt/notesSlides/notesSlide11.xml><?xml version="1.0" encoding="utf-8"?>
+<p:notes xmlns:a="http://schemas.openxmlformats.org/drawingml/2006/main" xmlns:r="http://schemas.openxmlformats.org/officeDocument/2006/relationships" xmlns:p="http://schemas.openxmlformats.org/presentationml/2006/main">
+  <p:cSld>
+    <p:spTree>
+      <p:nvGrpSpPr>
+        <p:cNvPr id="1" name=""/>
+        <p:cNvGrpSpPr/>
+        <p:nvPr/>
+      </p:nvGrpSpPr>
+      <p:grpSpPr>
+        <a:xfrm>
+          <a:off x="0" y="0"/>
+          <a:ext cx="0" cy="0"/>
+          <a:chOff x="0" y="0"/>
+          <a:chExt cx="0" cy="0"/>
+        </a:xfrm>
+      </p:grpSpPr>
+      <p:sp>
+        <p:nvSpPr>
+          <p:cNvPr id="2" name="Slide Image Placeholder 1"/>
+          <p:cNvSpPr>
+            <a:spLocks noGrp="1" noRot="1" noChangeAspect="1"/>
+          </p:cNvSpPr>
+          <p:nvPr>
+            <p:ph type="sldImg"/>
+          </p:nvPr>
+        </p:nvSpPr>
+        <p:spPr/>
+      </p:sp>
+      <p:sp>
+        <p:nvSpPr>
+          <p:cNvPr id="3" name="Notes Placeholder 2"/>
+          <p:cNvSpPr>
+            <a:spLocks noGrp="1"/>
+          </p:cNvSpPr>
+          <p:nvPr>
+            <p:ph type="body" idx="1"/>
+          </p:nvPr>
+        </p:nvSpPr>
+        <p:spPr/>
+        <p:txBody>
+          <a:bodyPr/>
+          <a:lstStyle/>
+          <a:p>
+            <a:endParaRPr lang="LID4096" dirty="0"/>
+          </a:p>
+        </p:txBody>
+      </p:sp>
+      <p:sp>
+        <p:nvSpPr>
+          <p:cNvPr id="4" name="Slide Number Placeholder 3"/>
+          <p:cNvSpPr>
+            <a:spLocks noGrp="1"/>
+          </p:cNvSpPr>
+          <p:nvPr>
+            <p:ph type="sldNum" sz="quarter" idx="5"/>
+          </p:nvPr>
+        </p:nvSpPr>
+        <p:spPr/>
+        <p:txBody>
+          <a:bodyPr/>
+          <a:lstStyle/>
+          <a:p>
+            <a:fld id="{E36C4827-840E-4EC5-B0B2-4EAAD02724FF}" type="slidenum">
+              <a:rPr lang="en-US" smtClean="0"/>
+              <a:t>17</a:t>
             </a:fld>
             <a:endParaRPr lang="en-US"/>
           </a:p>
@@ -901,7 +1212,343 @@
 </p:notes>
 </file>
 
+<file path=ppt/notesSlides/notesSlide12.xml><?xml version="1.0" encoding="utf-8"?>
+<p:notes xmlns:a="http://schemas.openxmlformats.org/drawingml/2006/main" xmlns:r="http://schemas.openxmlformats.org/officeDocument/2006/relationships" xmlns:p="http://schemas.openxmlformats.org/presentationml/2006/main">
+  <p:cSld>
+    <p:spTree>
+      <p:nvGrpSpPr>
+        <p:cNvPr id="1" name=""/>
+        <p:cNvGrpSpPr/>
+        <p:nvPr/>
+      </p:nvGrpSpPr>
+      <p:grpSpPr>
+        <a:xfrm>
+          <a:off x="0" y="0"/>
+          <a:ext cx="0" cy="0"/>
+          <a:chOff x="0" y="0"/>
+          <a:chExt cx="0" cy="0"/>
+        </a:xfrm>
+      </p:grpSpPr>
+      <p:sp>
+        <p:nvSpPr>
+          <p:cNvPr id="2" name="Slide Image Placeholder 1"/>
+          <p:cNvSpPr>
+            <a:spLocks noGrp="1" noRot="1" noChangeAspect="1"/>
+          </p:cNvSpPr>
+          <p:nvPr>
+            <p:ph type="sldImg"/>
+          </p:nvPr>
+        </p:nvSpPr>
+        <p:spPr/>
+      </p:sp>
+      <p:sp>
+        <p:nvSpPr>
+          <p:cNvPr id="3" name="Notes Placeholder 2"/>
+          <p:cNvSpPr>
+            <a:spLocks noGrp="1"/>
+          </p:cNvSpPr>
+          <p:nvPr>
+            <p:ph type="body" idx="1"/>
+          </p:nvPr>
+        </p:nvSpPr>
+        <p:spPr/>
+        <p:txBody>
+          <a:bodyPr/>
+          <a:lstStyle/>
+          <a:p>
+            <a:endParaRPr lang="en-US" dirty="0"/>
+          </a:p>
+        </p:txBody>
+      </p:sp>
+      <p:sp>
+        <p:nvSpPr>
+          <p:cNvPr id="4" name="Slide Number Placeholder 3"/>
+          <p:cNvSpPr>
+            <a:spLocks noGrp="1"/>
+          </p:cNvSpPr>
+          <p:nvPr>
+            <p:ph type="sldNum" sz="quarter" idx="10"/>
+          </p:nvPr>
+        </p:nvSpPr>
+        <p:spPr/>
+        <p:txBody>
+          <a:bodyPr/>
+          <a:lstStyle/>
+          <a:p>
+            <a:fld id="{E36C4827-840E-4EC5-B0B2-4EAAD02724FF}" type="slidenum">
+              <a:rPr lang="en-US" smtClean="0"/>
+              <a:t>19</a:t>
+            </a:fld>
+            <a:endParaRPr lang="en-US"/>
+          </a:p>
+        </p:txBody>
+      </p:sp>
+    </p:spTree>
+    <p:extLst>
+      <p:ext uri="{BB962C8B-B14F-4D97-AF65-F5344CB8AC3E}">
+        <p14:creationId xmlns:p14="http://schemas.microsoft.com/office/powerpoint/2010/main" val="265659658"/>
+      </p:ext>
+    </p:extLst>
+  </p:cSld>
+  <p:clrMapOvr>
+    <a:masterClrMapping/>
+  </p:clrMapOvr>
+</p:notes>
+</file>
+
+<file path=ppt/notesSlides/notesSlide13.xml><?xml version="1.0" encoding="utf-8"?>
+<p:notes xmlns:a="http://schemas.openxmlformats.org/drawingml/2006/main" xmlns:r="http://schemas.openxmlformats.org/officeDocument/2006/relationships" xmlns:p="http://schemas.openxmlformats.org/presentationml/2006/main">
+  <p:cSld>
+    <p:spTree>
+      <p:nvGrpSpPr>
+        <p:cNvPr id="1" name=""/>
+        <p:cNvGrpSpPr/>
+        <p:nvPr/>
+      </p:nvGrpSpPr>
+      <p:grpSpPr>
+        <a:xfrm>
+          <a:off x="0" y="0"/>
+          <a:ext cx="0" cy="0"/>
+          <a:chOff x="0" y="0"/>
+          <a:chExt cx="0" cy="0"/>
+        </a:xfrm>
+      </p:grpSpPr>
+      <p:sp>
+        <p:nvSpPr>
+          <p:cNvPr id="2" name="Slide Image Placeholder 1"/>
+          <p:cNvSpPr>
+            <a:spLocks noGrp="1" noRot="1" noChangeAspect="1"/>
+          </p:cNvSpPr>
+          <p:nvPr>
+            <p:ph type="sldImg"/>
+          </p:nvPr>
+        </p:nvSpPr>
+        <p:spPr/>
+      </p:sp>
+      <p:sp>
+        <p:nvSpPr>
+          <p:cNvPr id="3" name="Notes Placeholder 2"/>
+          <p:cNvSpPr>
+            <a:spLocks noGrp="1"/>
+          </p:cNvSpPr>
+          <p:nvPr>
+            <p:ph type="body" idx="1"/>
+          </p:nvPr>
+        </p:nvSpPr>
+        <p:spPr/>
+        <p:txBody>
+          <a:bodyPr/>
+          <a:lstStyle/>
+          <a:p>
+            <a:endParaRPr lang="en-US" dirty="0"/>
+          </a:p>
+        </p:txBody>
+      </p:sp>
+      <p:sp>
+        <p:nvSpPr>
+          <p:cNvPr id="4" name="Slide Number Placeholder 3"/>
+          <p:cNvSpPr>
+            <a:spLocks noGrp="1"/>
+          </p:cNvSpPr>
+          <p:nvPr>
+            <p:ph type="sldNum" sz="quarter" idx="10"/>
+          </p:nvPr>
+        </p:nvSpPr>
+        <p:spPr/>
+        <p:txBody>
+          <a:bodyPr/>
+          <a:lstStyle/>
+          <a:p>
+            <a:fld id="{E36C4827-840E-4EC5-B0B2-4EAAD02724FF}" type="slidenum">
+              <a:rPr lang="en-US" smtClean="0"/>
+              <a:t>21</a:t>
+            </a:fld>
+            <a:endParaRPr lang="en-US"/>
+          </a:p>
+        </p:txBody>
+      </p:sp>
+    </p:spTree>
+    <p:extLst>
+      <p:ext uri="{BB962C8B-B14F-4D97-AF65-F5344CB8AC3E}">
+        <p14:creationId xmlns:p14="http://schemas.microsoft.com/office/powerpoint/2010/main" val="1401970086"/>
+      </p:ext>
+    </p:extLst>
+  </p:cSld>
+  <p:clrMapOvr>
+    <a:masterClrMapping/>
+  </p:clrMapOvr>
+</p:notes>
+</file>
+
+<file path=ppt/notesSlides/notesSlide14.xml><?xml version="1.0" encoding="utf-8"?>
+<p:notes xmlns:a="http://schemas.openxmlformats.org/drawingml/2006/main" xmlns:r="http://schemas.openxmlformats.org/officeDocument/2006/relationships" xmlns:p="http://schemas.openxmlformats.org/presentationml/2006/main">
+  <p:cSld>
+    <p:spTree>
+      <p:nvGrpSpPr>
+        <p:cNvPr id="1" name=""/>
+        <p:cNvGrpSpPr/>
+        <p:nvPr/>
+      </p:nvGrpSpPr>
+      <p:grpSpPr>
+        <a:xfrm>
+          <a:off x="0" y="0"/>
+          <a:ext cx="0" cy="0"/>
+          <a:chOff x="0" y="0"/>
+          <a:chExt cx="0" cy="0"/>
+        </a:xfrm>
+      </p:grpSpPr>
+      <p:sp>
+        <p:nvSpPr>
+          <p:cNvPr id="2" name="Slide Image Placeholder 1"/>
+          <p:cNvSpPr>
+            <a:spLocks noGrp="1" noRot="1" noChangeAspect="1"/>
+          </p:cNvSpPr>
+          <p:nvPr>
+            <p:ph type="sldImg"/>
+          </p:nvPr>
+        </p:nvSpPr>
+        <p:spPr/>
+      </p:sp>
+      <p:sp>
+        <p:nvSpPr>
+          <p:cNvPr id="3" name="Notes Placeholder 2"/>
+          <p:cNvSpPr>
+            <a:spLocks noGrp="1"/>
+          </p:cNvSpPr>
+          <p:nvPr>
+            <p:ph type="body" idx="1"/>
+          </p:nvPr>
+        </p:nvSpPr>
+        <p:spPr/>
+        <p:txBody>
+          <a:bodyPr/>
+          <a:lstStyle/>
+          <a:p>
+            <a:endParaRPr lang="en-US" dirty="0"/>
+          </a:p>
+        </p:txBody>
+      </p:sp>
+      <p:sp>
+        <p:nvSpPr>
+          <p:cNvPr id="4" name="Slide Number Placeholder 3"/>
+          <p:cNvSpPr>
+            <a:spLocks noGrp="1"/>
+          </p:cNvSpPr>
+          <p:nvPr>
+            <p:ph type="sldNum" sz="quarter" idx="10"/>
+          </p:nvPr>
+        </p:nvSpPr>
+        <p:spPr/>
+        <p:txBody>
+          <a:bodyPr/>
+          <a:lstStyle/>
+          <a:p>
+            <a:fld id="{E36C4827-840E-4EC5-B0B2-4EAAD02724FF}" type="slidenum">
+              <a:rPr lang="en-US" smtClean="0"/>
+              <a:t>22</a:t>
+            </a:fld>
+            <a:endParaRPr lang="en-US"/>
+          </a:p>
+        </p:txBody>
+      </p:sp>
+    </p:spTree>
+    <p:extLst>
+      <p:ext uri="{BB962C8B-B14F-4D97-AF65-F5344CB8AC3E}">
+        <p14:creationId xmlns:p14="http://schemas.microsoft.com/office/powerpoint/2010/main" val="2351032451"/>
+      </p:ext>
+    </p:extLst>
+  </p:cSld>
+  <p:clrMapOvr>
+    <a:masterClrMapping/>
+  </p:clrMapOvr>
+</p:notes>
+</file>
+
 <file path=ppt/notesSlides/notesSlide2.xml><?xml version="1.0" encoding="utf-8"?>
+<p:notes xmlns:a="http://schemas.openxmlformats.org/drawingml/2006/main" xmlns:r="http://schemas.openxmlformats.org/officeDocument/2006/relationships" xmlns:p="http://schemas.openxmlformats.org/presentationml/2006/main">
+  <p:cSld>
+    <p:spTree>
+      <p:nvGrpSpPr>
+        <p:cNvPr id="1" name=""/>
+        <p:cNvGrpSpPr/>
+        <p:nvPr/>
+      </p:nvGrpSpPr>
+      <p:grpSpPr>
+        <a:xfrm>
+          <a:off x="0" y="0"/>
+          <a:ext cx="0" cy="0"/>
+          <a:chOff x="0" y="0"/>
+          <a:chExt cx="0" cy="0"/>
+        </a:xfrm>
+      </p:grpSpPr>
+      <p:sp>
+        <p:nvSpPr>
+          <p:cNvPr id="2" name="Slide Image Placeholder 1"/>
+          <p:cNvSpPr>
+            <a:spLocks noGrp="1" noRot="1" noChangeAspect="1"/>
+          </p:cNvSpPr>
+          <p:nvPr>
+            <p:ph type="sldImg"/>
+          </p:nvPr>
+        </p:nvSpPr>
+        <p:spPr/>
+      </p:sp>
+      <p:sp>
+        <p:nvSpPr>
+          <p:cNvPr id="3" name="Notes Placeholder 2"/>
+          <p:cNvSpPr>
+            <a:spLocks noGrp="1"/>
+          </p:cNvSpPr>
+          <p:nvPr>
+            <p:ph type="body" idx="1"/>
+          </p:nvPr>
+        </p:nvSpPr>
+        <p:spPr/>
+        <p:txBody>
+          <a:bodyPr/>
+          <a:lstStyle/>
+          <a:p>
+            <a:endParaRPr lang="nl-BE" dirty="0"/>
+          </a:p>
+        </p:txBody>
+      </p:sp>
+      <p:sp>
+        <p:nvSpPr>
+          <p:cNvPr id="4" name="Slide Number Placeholder 3"/>
+          <p:cNvSpPr>
+            <a:spLocks noGrp="1"/>
+          </p:cNvSpPr>
+          <p:nvPr>
+            <p:ph type="sldNum" sz="quarter" idx="10"/>
+          </p:nvPr>
+        </p:nvSpPr>
+        <p:spPr/>
+        <p:txBody>
+          <a:bodyPr/>
+          <a:lstStyle/>
+          <a:p>
+            <a:fld id="{E36C4827-840E-4EC5-B0B2-4EAAD02724FF}" type="slidenum">
+              <a:rPr lang="en-US" smtClean="0"/>
+              <a:t>2</a:t>
+            </a:fld>
+            <a:endParaRPr lang="en-US"/>
+          </a:p>
+        </p:txBody>
+      </p:sp>
+    </p:spTree>
+    <p:extLst>
+      <p:ext uri="{BB962C8B-B14F-4D97-AF65-F5344CB8AC3E}">
+        <p14:creationId xmlns:p14="http://schemas.microsoft.com/office/powerpoint/2010/main" val="4111050408"/>
+      </p:ext>
+    </p:extLst>
+  </p:cSld>
+  <p:clrMapOvr>
+    <a:masterClrMapping/>
+  </p:clrMapOvr>
+</p:notes>
+</file>
+
+<file path=ppt/notesSlides/notesSlide3.xml><?xml version="1.0" encoding="utf-8"?>
 <p:notes xmlns:a="http://schemas.openxmlformats.org/drawingml/2006/main" xmlns:r="http://schemas.openxmlformats.org/officeDocument/2006/relationships" xmlns:p="http://schemas.openxmlformats.org/presentationml/2006/main">
   <p:cSld>
     <p:spTree>
@@ -990,7 +1637,7 @@
           <a:p>
             <a:fld id="{E36C4827-840E-4EC5-B0B2-4EAAD02724FF}" type="slidenum">
               <a:rPr lang="en-US" smtClean="0"/>
-              <a:t>7</a:t>
+              <a:t>9</a:t>
             </a:fld>
             <a:endParaRPr lang="en-US"/>
           </a:p>
@@ -1000,90 +1647,6 @@
     <p:extLst>
       <p:ext uri="{BB962C8B-B14F-4D97-AF65-F5344CB8AC3E}">
         <p14:creationId xmlns:p14="http://schemas.microsoft.com/office/powerpoint/2010/main" val="273506988"/>
-      </p:ext>
-    </p:extLst>
-  </p:cSld>
-  <p:clrMapOvr>
-    <a:masterClrMapping/>
-  </p:clrMapOvr>
-</p:notes>
-</file>
-
-<file path=ppt/notesSlides/notesSlide3.xml><?xml version="1.0" encoding="utf-8"?>
-<p:notes xmlns:a="http://schemas.openxmlformats.org/drawingml/2006/main" xmlns:r="http://schemas.openxmlformats.org/officeDocument/2006/relationships" xmlns:p="http://schemas.openxmlformats.org/presentationml/2006/main">
-  <p:cSld>
-    <p:spTree>
-      <p:nvGrpSpPr>
-        <p:cNvPr id="1" name=""/>
-        <p:cNvGrpSpPr/>
-        <p:nvPr/>
-      </p:nvGrpSpPr>
-      <p:grpSpPr>
-        <a:xfrm>
-          <a:off x="0" y="0"/>
-          <a:ext cx="0" cy="0"/>
-          <a:chOff x="0" y="0"/>
-          <a:chExt cx="0" cy="0"/>
-        </a:xfrm>
-      </p:grpSpPr>
-      <p:sp>
-        <p:nvSpPr>
-          <p:cNvPr id="2" name="Slide Image Placeholder 1"/>
-          <p:cNvSpPr>
-            <a:spLocks noGrp="1" noRot="1" noChangeAspect="1"/>
-          </p:cNvSpPr>
-          <p:nvPr>
-            <p:ph type="sldImg"/>
-          </p:nvPr>
-        </p:nvSpPr>
-        <p:spPr/>
-      </p:sp>
-      <p:sp>
-        <p:nvSpPr>
-          <p:cNvPr id="3" name="Notes Placeholder 2"/>
-          <p:cNvSpPr>
-            <a:spLocks noGrp="1"/>
-          </p:cNvSpPr>
-          <p:nvPr>
-            <p:ph type="body" idx="1"/>
-          </p:nvPr>
-        </p:nvSpPr>
-        <p:spPr/>
-        <p:txBody>
-          <a:bodyPr/>
-          <a:lstStyle/>
-          <a:p>
-            <a:endParaRPr lang="en-US" dirty="0"/>
-          </a:p>
-        </p:txBody>
-      </p:sp>
-      <p:sp>
-        <p:nvSpPr>
-          <p:cNvPr id="4" name="Slide Number Placeholder 3"/>
-          <p:cNvSpPr>
-            <a:spLocks noGrp="1"/>
-          </p:cNvSpPr>
-          <p:nvPr>
-            <p:ph type="sldNum" sz="quarter" idx="10"/>
-          </p:nvPr>
-        </p:nvSpPr>
-        <p:spPr/>
-        <p:txBody>
-          <a:bodyPr/>
-          <a:lstStyle/>
-          <a:p>
-            <a:fld id="{E36C4827-840E-4EC5-B0B2-4EAAD02724FF}" type="slidenum">
-              <a:rPr lang="en-US" smtClean="0"/>
-              <a:t>8</a:t>
-            </a:fld>
-            <a:endParaRPr lang="en-US"/>
-          </a:p>
-        </p:txBody>
-      </p:sp>
-    </p:spTree>
-    <p:extLst>
-      <p:ext uri="{BB962C8B-B14F-4D97-AF65-F5344CB8AC3E}">
-        <p14:creationId xmlns:p14="http://schemas.microsoft.com/office/powerpoint/2010/main" val="2579532910"/>
       </p:ext>
     </p:extLst>
   </p:cSld>
@@ -1158,7 +1721,7 @@
           <a:p>
             <a:fld id="{E36C4827-840E-4EC5-B0B2-4EAAD02724FF}" type="slidenum">
               <a:rPr lang="en-US" smtClean="0"/>
-              <a:t>9</a:t>
+              <a:t>10</a:t>
             </a:fld>
             <a:endParaRPr lang="en-US"/>
           </a:p>
@@ -1167,7 +1730,7 @@
     </p:spTree>
     <p:extLst>
       <p:ext uri="{BB962C8B-B14F-4D97-AF65-F5344CB8AC3E}">
-        <p14:creationId xmlns:p14="http://schemas.microsoft.com/office/powerpoint/2010/main" val="2366139153"/>
+        <p14:creationId xmlns:p14="http://schemas.microsoft.com/office/powerpoint/2010/main" val="2579532910"/>
       </p:ext>
     </p:extLst>
   </p:cSld>
@@ -1242,7 +1805,7 @@
           <a:p>
             <a:fld id="{E36C4827-840E-4EC5-B0B2-4EAAD02724FF}" type="slidenum">
               <a:rPr lang="en-US" smtClean="0"/>
-              <a:t>10</a:t>
+              <a:t>11</a:t>
             </a:fld>
             <a:endParaRPr lang="en-US"/>
           </a:p>
@@ -1251,7 +1814,7 @@
     </p:spTree>
     <p:extLst>
       <p:ext uri="{BB962C8B-B14F-4D97-AF65-F5344CB8AC3E}">
-        <p14:creationId xmlns:p14="http://schemas.microsoft.com/office/powerpoint/2010/main" val="1186017497"/>
+        <p14:creationId xmlns:p14="http://schemas.microsoft.com/office/powerpoint/2010/main" val="2366139153"/>
       </p:ext>
     </p:extLst>
   </p:cSld>
@@ -1326,7 +1889,7 @@
           <a:p>
             <a:fld id="{E36C4827-840E-4EC5-B0B2-4EAAD02724FF}" type="slidenum">
               <a:rPr lang="en-US" smtClean="0"/>
-              <a:t>11</a:t>
+              <a:t>12</a:t>
             </a:fld>
             <a:endParaRPr lang="en-US"/>
           </a:p>
@@ -1335,7 +1898,7 @@
     </p:spTree>
     <p:extLst>
       <p:ext uri="{BB962C8B-B14F-4D97-AF65-F5344CB8AC3E}">
-        <p14:creationId xmlns:p14="http://schemas.microsoft.com/office/powerpoint/2010/main" val="2423599417"/>
+        <p14:creationId xmlns:p14="http://schemas.microsoft.com/office/powerpoint/2010/main" val="1186017497"/>
       </p:ext>
     </p:extLst>
   </p:cSld>
@@ -1410,7 +1973,7 @@
           <a:p>
             <a:fld id="{E36C4827-840E-4EC5-B0B2-4EAAD02724FF}" type="slidenum">
               <a:rPr lang="en-US" smtClean="0"/>
-              <a:t>12</a:t>
+              <a:t>13</a:t>
             </a:fld>
             <a:endParaRPr lang="en-US"/>
           </a:p>
@@ -1419,7 +1982,7 @@
     </p:spTree>
     <p:extLst>
       <p:ext uri="{BB962C8B-B14F-4D97-AF65-F5344CB8AC3E}">
-        <p14:creationId xmlns:p14="http://schemas.microsoft.com/office/powerpoint/2010/main" val="3568242645"/>
+        <p14:creationId xmlns:p14="http://schemas.microsoft.com/office/powerpoint/2010/main" val="2423599417"/>
       </p:ext>
     </p:extLst>
   </p:cSld>
@@ -1494,7 +2057,7 @@
           <a:p>
             <a:fld id="{E36C4827-840E-4EC5-B0B2-4EAAD02724FF}" type="slidenum">
               <a:rPr lang="en-US" smtClean="0"/>
-              <a:t>13</a:t>
+              <a:t>14</a:t>
             </a:fld>
             <a:endParaRPr lang="en-US"/>
           </a:p>
@@ -1503,7 +2066,7 @@
     </p:spTree>
     <p:extLst>
       <p:ext uri="{BB962C8B-B14F-4D97-AF65-F5344CB8AC3E}">
-        <p14:creationId xmlns:p14="http://schemas.microsoft.com/office/powerpoint/2010/main" val="1377911668"/>
+        <p14:creationId xmlns:p14="http://schemas.microsoft.com/office/powerpoint/2010/main" val="3568242645"/>
       </p:ext>
     </p:extLst>
   </p:cSld>
@@ -1578,7 +2141,7 @@
           <a:p>
             <a:fld id="{E36C4827-840E-4EC5-B0B2-4EAAD02724FF}" type="slidenum">
               <a:rPr lang="en-US" smtClean="0"/>
-              <a:t>14</a:t>
+              <a:t>15</a:t>
             </a:fld>
             <a:endParaRPr lang="en-US"/>
           </a:p>
@@ -1587,7 +2150,7 @@
     </p:spTree>
     <p:extLst>
       <p:ext uri="{BB962C8B-B14F-4D97-AF65-F5344CB8AC3E}">
-        <p14:creationId xmlns:p14="http://schemas.microsoft.com/office/powerpoint/2010/main" val="994736307"/>
+        <p14:creationId xmlns:p14="http://schemas.microsoft.com/office/powerpoint/2010/main" val="1377911668"/>
       </p:ext>
     </p:extLst>
   </p:cSld>
@@ -1728,7 +2291,7 @@
           <a:p>
             <a:fld id="{477A1531-9024-480F-9D7B-19915C1DCDF5}" type="datetimeFigureOut">
               <a:rPr lang="en-GB" smtClean="0"/>
-              <a:t>24/11/2024</a:t>
+              <a:t>03/03/2026</a:t>
             </a:fld>
             <a:endParaRPr lang="en-GB"/>
           </a:p>
@@ -1898,7 +2461,7 @@
           <a:p>
             <a:fld id="{477A1531-9024-480F-9D7B-19915C1DCDF5}" type="datetimeFigureOut">
               <a:rPr lang="en-GB" smtClean="0"/>
-              <a:t>24/11/2024</a:t>
+              <a:t>03/03/2026</a:t>
             </a:fld>
             <a:endParaRPr lang="en-GB"/>
           </a:p>
@@ -2078,7 +2641,7 @@
           <a:p>
             <a:fld id="{477A1531-9024-480F-9D7B-19915C1DCDF5}" type="datetimeFigureOut">
               <a:rPr lang="en-GB" smtClean="0"/>
-              <a:t>24/11/2024</a:t>
+              <a:t>03/03/2026</a:t>
             </a:fld>
             <a:endParaRPr lang="en-GB"/>
           </a:p>
@@ -2248,7 +2811,7 @@
           <a:p>
             <a:fld id="{477A1531-9024-480F-9D7B-19915C1DCDF5}" type="datetimeFigureOut">
               <a:rPr lang="en-GB" smtClean="0"/>
-              <a:t>24/11/2024</a:t>
+              <a:t>03/03/2026</a:t>
             </a:fld>
             <a:endParaRPr lang="en-GB"/>
           </a:p>
@@ -2494,7 +3057,7 @@
           <a:p>
             <a:fld id="{477A1531-9024-480F-9D7B-19915C1DCDF5}" type="datetimeFigureOut">
               <a:rPr lang="en-GB" smtClean="0"/>
-              <a:t>24/11/2024</a:t>
+              <a:t>03/03/2026</a:t>
             </a:fld>
             <a:endParaRPr lang="en-GB"/>
           </a:p>
@@ -2726,7 +3289,7 @@
           <a:p>
             <a:fld id="{477A1531-9024-480F-9D7B-19915C1DCDF5}" type="datetimeFigureOut">
               <a:rPr lang="en-GB" smtClean="0"/>
-              <a:t>24/11/2024</a:t>
+              <a:t>03/03/2026</a:t>
             </a:fld>
             <a:endParaRPr lang="en-GB"/>
           </a:p>
@@ -3093,7 +3656,7 @@
           <a:p>
             <a:fld id="{477A1531-9024-480F-9D7B-19915C1DCDF5}" type="datetimeFigureOut">
               <a:rPr lang="en-GB" smtClean="0"/>
-              <a:t>24/11/2024</a:t>
+              <a:t>03/03/2026</a:t>
             </a:fld>
             <a:endParaRPr lang="en-GB"/>
           </a:p>
@@ -3211,7 +3774,7 @@
           <a:p>
             <a:fld id="{477A1531-9024-480F-9D7B-19915C1DCDF5}" type="datetimeFigureOut">
               <a:rPr lang="en-GB" smtClean="0"/>
-              <a:t>24/11/2024</a:t>
+              <a:t>03/03/2026</a:t>
             </a:fld>
             <a:endParaRPr lang="en-GB"/>
           </a:p>
@@ -3306,7 +3869,7 @@
           <a:p>
             <a:fld id="{477A1531-9024-480F-9D7B-19915C1DCDF5}" type="datetimeFigureOut">
               <a:rPr lang="en-GB" smtClean="0"/>
-              <a:t>24/11/2024</a:t>
+              <a:t>03/03/2026</a:t>
             </a:fld>
             <a:endParaRPr lang="en-GB"/>
           </a:p>
@@ -3583,7 +4146,7 @@
           <a:p>
             <a:fld id="{477A1531-9024-480F-9D7B-19915C1DCDF5}" type="datetimeFigureOut">
               <a:rPr lang="en-GB" smtClean="0"/>
-              <a:t>24/11/2024</a:t>
+              <a:t>03/03/2026</a:t>
             </a:fld>
             <a:endParaRPr lang="en-GB"/>
           </a:p>
@@ -3836,7 +4399,7 @@
           <a:p>
             <a:fld id="{477A1531-9024-480F-9D7B-19915C1DCDF5}" type="datetimeFigureOut">
               <a:rPr lang="en-GB" smtClean="0"/>
-              <a:t>24/11/2024</a:t>
+              <a:t>03/03/2026</a:t>
             </a:fld>
             <a:endParaRPr lang="en-GB"/>
           </a:p>
@@ -4049,7 +4612,7 @@
           <a:p>
             <a:fld id="{477A1531-9024-480F-9D7B-19915C1DCDF5}" type="datetimeFigureOut">
               <a:rPr lang="en-GB" smtClean="0"/>
-              <a:t>24/11/2024</a:t>
+              <a:t>03/03/2026</a:t>
             </a:fld>
             <a:endParaRPr lang="en-GB"/>
           </a:p>
@@ -4442,7 +5005,13 @@
   <p:cSld>
     <p:spTree>
       <p:nvGrpSpPr>
-        <p:cNvPr id="1" name=""/>
+        <p:cNvPr id="1" name="">
+          <a:extLst>
+            <a:ext uri="{FF2B5EF4-FFF2-40B4-BE49-F238E27FC236}">
+              <a16:creationId xmlns:a16="http://schemas.microsoft.com/office/drawing/2014/main" id="{AC2E97EE-9EF7-91E2-E498-CE899707DE23}"/>
+            </a:ext>
+          </a:extLst>
+        </p:cNvPr>
         <p:cNvGrpSpPr/>
         <p:nvPr/>
       </p:nvGrpSpPr>
@@ -4459,7 +5028,7 @@
           <p:cNvPr id="5" name="TextBox 4">
             <a:extLst>
               <a:ext uri="{FF2B5EF4-FFF2-40B4-BE49-F238E27FC236}">
-                <a16:creationId xmlns:a16="http://schemas.microsoft.com/office/drawing/2014/main" id="{0E2CB1A6-46E1-FE3F-5EB3-4EDF592FBD9E}"/>
+                <a16:creationId xmlns:a16="http://schemas.microsoft.com/office/drawing/2014/main" id="{F6487672-A4DC-A86C-D42B-E9A23FB90054}"/>
               </a:ext>
             </a:extLst>
           </p:cNvPr>
@@ -4484,210 +5053,91 @@
           <a:p>
             <a:r>
               <a:rPr lang="en-US" sz="2800" dirty="0">
-                <a:latin typeface="+mj-lt"/>
                 <a:ea typeface="Lato" panose="020B0604020202020204" pitchFamily="34" charset="0"/>
                 <a:cs typeface="Helvetica" panose="020B0604020202020204" pitchFamily="34" charset="0"/>
               </a:rPr>
-              <a:t>decision tree models</a:t>
+              <a:t>Ensemble methods</a:t>
             </a:r>
             <a:endParaRPr lang="en-GB" sz="2800" dirty="0">
-              <a:latin typeface="+mj-lt"/>
               <a:ea typeface="Lato" panose="020B0604020202020204" pitchFamily="34" charset="0"/>
               <a:cs typeface="Helvetica" panose="020B0604020202020204" pitchFamily="34" charset="0"/>
             </a:endParaRPr>
           </a:p>
         </p:txBody>
       </p:sp>
-      <p:pic>
-        <p:nvPicPr>
-          <p:cNvPr id="1026" name="Picture 2">
+      <p:sp>
+        <p:nvSpPr>
+          <p:cNvPr id="3" name="TextBox 2">
             <a:extLst>
               <a:ext uri="{FF2B5EF4-FFF2-40B4-BE49-F238E27FC236}">
-                <a16:creationId xmlns:a16="http://schemas.microsoft.com/office/drawing/2014/main" id="{466F50F7-913E-E67D-09BF-3713A97EE9C3}"/>
+                <a16:creationId xmlns:a16="http://schemas.microsoft.com/office/drawing/2014/main" id="{3CB2A1EF-CA1C-F48F-829F-46839BB93947}"/>
               </a:ext>
             </a:extLst>
           </p:cNvPr>
-          <p:cNvPicPr>
-            <a:picLocks noChangeAspect="1" noChangeArrowheads="1"/>
-          </p:cNvPicPr>
+          <p:cNvSpPr txBox="1"/>
           <p:nvPr/>
-        </p:nvPicPr>
-        <p:blipFill>
-          <a:blip r:embed="rId3">
-            <a:extLst>
-              <a:ext uri="{28A0092B-C50C-407E-A947-70E740481C1C}">
-                <a14:useLocalDpi xmlns:a14="http://schemas.microsoft.com/office/drawing/2010/main" val="0"/>
-              </a:ext>
-            </a:extLst>
-          </a:blip>
-          <a:srcRect/>
-          <a:stretch>
-            <a:fillRect/>
-          </a:stretch>
-        </p:blipFill>
-        <p:spPr bwMode="auto">
-          <a:xfrm>
-            <a:off x="6115051" y="2156055"/>
-            <a:ext cx="5894342" cy="4172985"/>
+        </p:nvSpPr>
+        <p:spPr>
+          <a:xfrm>
+            <a:off x="340912" y="1249165"/>
+            <a:ext cx="11000096" cy="1938992"/>
           </a:xfrm>
           <a:prstGeom prst="rect">
             <a:avLst/>
           </a:prstGeom>
           <a:noFill/>
-          <a:extLst>
-            <a:ext uri="{909E8E84-426E-40DD-AFC4-6F175D3DCCD1}">
-              <a14:hiddenFill xmlns:a14="http://schemas.microsoft.com/office/drawing/2010/main">
-                <a:solidFill>
-                  <a:srgbClr val="FFFFFF"/>
-                </a:solidFill>
-              </a14:hiddenFill>
-            </a:ext>
-          </a:extLst>
-        </p:spPr>
-      </p:pic>
-      <p:pic>
-        <p:nvPicPr>
-          <p:cNvPr id="1028" name="Picture 4" descr="Entropy: How Decision Trees Make Decisions | by Sam T | Towards Data Science">
-            <a:extLst>
-              <a:ext uri="{FF2B5EF4-FFF2-40B4-BE49-F238E27FC236}">
-                <a16:creationId xmlns:a16="http://schemas.microsoft.com/office/drawing/2014/main" id="{A72BE986-0CB7-19BC-8F2C-A96A4AC020C3}"/>
-              </a:ext>
-            </a:extLst>
-          </p:cNvPr>
-          <p:cNvPicPr>
-            <a:picLocks noChangeAspect="1" noChangeArrowheads="1"/>
-          </p:cNvPicPr>
-          <p:nvPr/>
-        </p:nvPicPr>
-        <p:blipFill>
-          <a:blip r:embed="rId4">
-            <a:extLst>
-              <a:ext uri="{28A0092B-C50C-407E-A947-70E740481C1C}">
-                <a14:useLocalDpi xmlns:a14="http://schemas.microsoft.com/office/drawing/2010/main" val="0"/>
-              </a:ext>
-            </a:extLst>
-          </a:blip>
-          <a:srcRect/>
-          <a:stretch>
-            <a:fillRect/>
-          </a:stretch>
-        </p:blipFill>
-        <p:spPr bwMode="auto">
-          <a:xfrm>
-            <a:off x="810350" y="1084235"/>
-            <a:ext cx="5108363" cy="5029200"/>
-          </a:xfrm>
-          <a:prstGeom prst="rect">
-            <a:avLst/>
-          </a:prstGeom>
-          <a:noFill/>
-          <a:extLst>
-            <a:ext uri="{909E8E84-426E-40DD-AFC4-6F175D3DCCD1}">
-              <a14:hiddenFill xmlns:a14="http://schemas.microsoft.com/office/drawing/2010/main">
-                <a:solidFill>
-                  <a:srgbClr val="FFFFFF"/>
-                </a:solidFill>
-              </a14:hiddenFill>
-            </a:ext>
-          </a:extLst>
-        </p:spPr>
-      </p:pic>
-      <p:pic>
-        <p:nvPicPr>
-          <p:cNvPr id="1030" name="Picture 6">
-            <a:extLst>
-              <a:ext uri="{FF2B5EF4-FFF2-40B4-BE49-F238E27FC236}">
-                <a16:creationId xmlns:a16="http://schemas.microsoft.com/office/drawing/2014/main" id="{ED51A179-2E1F-A646-2D29-E4A17F721819}"/>
-              </a:ext>
-            </a:extLst>
-          </p:cNvPr>
-          <p:cNvPicPr>
-            <a:picLocks noChangeAspect="1" noChangeArrowheads="1"/>
-          </p:cNvPicPr>
-          <p:nvPr/>
-        </p:nvPicPr>
-        <p:blipFill>
-          <a:blip r:embed="rId5">
-            <a:extLst>
-              <a:ext uri="{28A0092B-C50C-407E-A947-70E740481C1C}">
-                <a14:useLocalDpi xmlns:a14="http://schemas.microsoft.com/office/drawing/2010/main" val="0"/>
-              </a:ext>
-            </a:extLst>
-          </a:blip>
-          <a:srcRect/>
-          <a:stretch>
-            <a:fillRect/>
-          </a:stretch>
-        </p:blipFill>
-        <p:spPr bwMode="auto">
-          <a:xfrm>
-            <a:off x="7421200" y="1178688"/>
-            <a:ext cx="3724275" cy="866775"/>
-          </a:xfrm>
-          <a:prstGeom prst="rect">
-            <a:avLst/>
-          </a:prstGeom>
-          <a:noFill/>
-          <a:extLst>
-            <a:ext uri="{909E8E84-426E-40DD-AFC4-6F175D3DCCD1}">
-              <a14:hiddenFill xmlns:a14="http://schemas.microsoft.com/office/drawing/2010/main">
-                <a:solidFill>
-                  <a:srgbClr val="FFFFFF"/>
-                </a:solidFill>
-              </a14:hiddenFill>
-            </a:ext>
-          </a:extLst>
-        </p:spPr>
-      </p:pic>
-      <p:pic>
-        <p:nvPicPr>
-          <p:cNvPr id="3" name="Picture 4" descr="Entropy: How Decision Trees Make Decisions | by Sam T | Towards Data Science">
-            <a:extLst>
-              <a:ext uri="{FF2B5EF4-FFF2-40B4-BE49-F238E27FC236}">
-                <a16:creationId xmlns:a16="http://schemas.microsoft.com/office/drawing/2014/main" id="{C1545E87-DE42-8760-8B88-D6A16C559900}"/>
-              </a:ext>
-            </a:extLst>
-          </p:cNvPr>
-          <p:cNvPicPr>
-            <a:picLocks noChangeAspect="1" noChangeArrowheads="1"/>
-          </p:cNvPicPr>
-          <p:nvPr/>
-        </p:nvPicPr>
-        <p:blipFill rotWithShape="1">
-          <a:blip r:embed="rId4">
-            <a:extLst>
-              <a:ext uri="{28A0092B-C50C-407E-A947-70E740481C1C}">
-                <a14:useLocalDpi xmlns:a14="http://schemas.microsoft.com/office/drawing/2010/main" val="0"/>
-              </a:ext>
-            </a:extLst>
-          </a:blip>
-          <a:srcRect l="57501" t="12746" r="38682" b="83617"/>
-          <a:stretch/>
-        </p:blipFill>
-        <p:spPr bwMode="auto">
-          <a:xfrm>
-            <a:off x="9159172" y="5919125"/>
-            <a:ext cx="194990" cy="182880"/>
-          </a:xfrm>
-          <a:prstGeom prst="rect">
-            <a:avLst/>
-          </a:prstGeom>
-          <a:noFill/>
-          <a:extLst>
-            <a:ext uri="{909E8E84-426E-40DD-AFC4-6F175D3DCCD1}">
-              <a14:hiddenFill xmlns:a14="http://schemas.microsoft.com/office/drawing/2010/main">
-                <a:solidFill>
-                  <a:srgbClr val="FFFFFF"/>
-                </a:solidFill>
-              </a14:hiddenFill>
-            </a:ext>
-          </a:extLst>
-        </p:spPr>
-      </p:pic>
+        </p:spPr>
+        <p:txBody>
+          <a:bodyPr wrap="square" rtlCol="0">
+            <a:spAutoFit/>
+          </a:bodyPr>
+          <a:lstStyle/>
+          <a:p>
+            <a:r>
+              <a:rPr lang="en-GB" sz="2000" dirty="0"/>
+              <a:t>Decision trees serve as the foundation for </a:t>
+            </a:r>
+            <a:r>
+              <a:rPr lang="en-GB" sz="2000" b="1" dirty="0"/>
+              <a:t>ensemble methods </a:t>
+            </a:r>
+            <a:r>
+              <a:rPr lang="en-GB" sz="2000" dirty="0"/>
+              <a:t>like Random Forest and Gradient Boosting, which combine multiple trees to improve accuracy and robustness.</a:t>
+            </a:r>
+          </a:p>
+          <a:p>
+            <a:endParaRPr lang="en-GB" sz="2000" dirty="0"/>
+          </a:p>
+          <a:p>
+            <a:r>
+              <a:rPr lang="en-GB" sz="2000" dirty="0"/>
+              <a:t>Ensemble learning reduces </a:t>
+            </a:r>
+            <a:r>
+              <a:rPr lang="en-GB" sz="2000" b="1" dirty="0"/>
+              <a:t>variance and bias</a:t>
+            </a:r>
+            <a:r>
+              <a:rPr lang="en-GB" sz="2000" dirty="0"/>
+              <a:t>, as bagging (e.g., Random Forest) decreases overfitting, while boosting (e.g., AdaBoost, </a:t>
+            </a:r>
+            <a:r>
+              <a:rPr lang="en-GB" sz="2000" dirty="0" err="1"/>
+              <a:t>XGBoost</a:t>
+            </a:r>
+            <a:r>
+              <a:rPr lang="en-GB" sz="2000" dirty="0"/>
+              <a:t>) enhances weak learners by correcting misclassified instances iteratively.</a:t>
+            </a:r>
+            <a:endParaRPr lang="LID4096" sz="2000" dirty="0"/>
+          </a:p>
+        </p:txBody>
+      </p:sp>
     </p:spTree>
     <p:extLst>
       <p:ext uri="{BB962C8B-B14F-4D97-AF65-F5344CB8AC3E}">
-        <p14:creationId xmlns:p14="http://schemas.microsoft.com/office/powerpoint/2010/main" val="4071848948"/>
+        <p14:creationId xmlns:p14="http://schemas.microsoft.com/office/powerpoint/2010/main" val="3754802310"/>
       </p:ext>
     </p:extLst>
   </p:cSld>
@@ -4714,133 +5164,12 @@
           <a:chExt cx="0" cy="0"/>
         </a:xfrm>
       </p:grpSpPr>
-      <p:sp>
-        <p:nvSpPr>
-          <p:cNvPr id="5" name="TextBox 4"/>
-          <p:cNvSpPr txBox="1"/>
-          <p:nvPr/>
-        </p:nvSpPr>
-        <p:spPr>
-          <a:xfrm>
-            <a:off x="1172211" y="1599995"/>
-            <a:ext cx="9130555" cy="2246769"/>
-          </a:xfrm>
-          <a:prstGeom prst="rect">
-            <a:avLst/>
-          </a:prstGeom>
-          <a:noFill/>
-        </p:spPr>
-        <p:txBody>
-          <a:bodyPr wrap="square" rtlCol="0">
-            <a:spAutoFit/>
-          </a:bodyPr>
-          <a:lstStyle/>
-          <a:p>
-            <a:pPr marL="342900" indent="-342900">
-              <a:buFont typeface="Courier New" panose="02070309020205020404" pitchFamily="49" charset="0"/>
-              <a:buChar char="o"/>
-            </a:pPr>
-            <a:r>
-              <a:rPr lang="en-US" sz="2000" dirty="0">
-                <a:latin typeface="Calibri" panose="020F0502020204030204" pitchFamily="34" charset="0"/>
-              </a:rPr>
-              <a:t>Simulate the notion of different train set samples:</a:t>
-            </a:r>
-          </a:p>
-          <a:p>
-            <a:pPr marL="342900" indent="-342900">
-              <a:buFont typeface="Courier New" panose="02070309020205020404" pitchFamily="49" charset="0"/>
-              <a:buChar char="o"/>
-            </a:pPr>
-            <a:endParaRPr lang="en-US" sz="2000" dirty="0">
-              <a:latin typeface="Calibri" panose="020F0502020204030204" pitchFamily="34" charset="0"/>
-            </a:endParaRPr>
-          </a:p>
-          <a:p>
-            <a:pPr marL="1371600" lvl="2" indent="-457200">
-              <a:buFont typeface="+mj-lt"/>
-              <a:buAutoNum type="arabicPeriod"/>
-            </a:pPr>
-            <a:r>
-              <a:rPr lang="en-US" sz="2000" dirty="0">
-                <a:latin typeface="Calibri" panose="020F0502020204030204" pitchFamily="34" charset="0"/>
-              </a:rPr>
-              <a:t>sample data points from train set to create new train set</a:t>
-            </a:r>
-          </a:p>
-          <a:p>
-            <a:pPr marL="1371600" lvl="2" indent="-457200">
-              <a:buFont typeface="+mj-lt"/>
-              <a:buAutoNum type="arabicPeriod"/>
-            </a:pPr>
-            <a:r>
-              <a:rPr lang="en-US" sz="2000" dirty="0">
-                <a:latin typeface="Calibri" panose="020F0502020204030204" pitchFamily="34" charset="0"/>
-              </a:rPr>
-              <a:t>fit low bias high variance model on new train set</a:t>
-            </a:r>
-          </a:p>
-          <a:p>
-            <a:pPr marL="1371600" lvl="2" indent="-457200">
-              <a:buFont typeface="+mj-lt"/>
-              <a:buAutoNum type="arabicPeriod"/>
-            </a:pPr>
-            <a:r>
-              <a:rPr lang="en-US" sz="2000" dirty="0">
-                <a:latin typeface="Calibri" panose="020F0502020204030204" pitchFamily="34" charset="0"/>
-              </a:rPr>
-              <a:t>repeat steps (1) and (2) </a:t>
-            </a:r>
-            <a:r>
-              <a:rPr lang="en-US" sz="2000" i="1" dirty="0">
-                <a:latin typeface="Calibri" panose="020F0502020204030204" pitchFamily="34" charset="0"/>
-              </a:rPr>
-              <a:t>T</a:t>
-            </a:r>
-            <a:r>
-              <a:rPr lang="en-US" sz="2000" dirty="0">
-                <a:latin typeface="Calibri" panose="020F0502020204030204" pitchFamily="34" charset="0"/>
-              </a:rPr>
-              <a:t> times</a:t>
-            </a:r>
-          </a:p>
-          <a:p>
-            <a:pPr marL="1371600" lvl="2" indent="-457200">
-              <a:buFont typeface="+mj-lt"/>
-              <a:buAutoNum type="arabicPeriod"/>
-            </a:pPr>
-            <a:r>
-              <a:rPr lang="en-US" sz="2000" dirty="0">
-                <a:latin typeface="Calibri" panose="020F0502020204030204" pitchFamily="34" charset="0"/>
-              </a:rPr>
-              <a:t>average the predictions of the </a:t>
-            </a:r>
-            <a:r>
-              <a:rPr lang="en-US" sz="2000" i="1" dirty="0">
-                <a:latin typeface="Calibri" panose="020F0502020204030204" pitchFamily="34" charset="0"/>
-              </a:rPr>
-              <a:t>T</a:t>
-            </a:r>
-            <a:r>
-              <a:rPr lang="en-US" sz="2000" dirty="0">
-                <a:latin typeface="Calibri" panose="020F0502020204030204" pitchFamily="34" charset="0"/>
-              </a:rPr>
-              <a:t> models  </a:t>
-            </a:r>
-          </a:p>
-          <a:p>
-            <a:endParaRPr lang="nl-BE" sz="2000" dirty="0">
-              <a:latin typeface="Calibri" panose="020F0502020204030204" pitchFamily="34" charset="0"/>
-            </a:endParaRPr>
-          </a:p>
-        </p:txBody>
-      </p:sp>
       <p:pic>
         <p:nvPicPr>
           <p:cNvPr id="6" name="Picture 5">
             <a:extLst>
               <a:ext uri="{FF2B5EF4-FFF2-40B4-BE49-F238E27FC236}">
-                <a16:creationId xmlns:a16="http://schemas.microsoft.com/office/drawing/2014/main" id="{0249A3C4-5E88-4059-831F-EFBC517E5ACF}"/>
+                <a16:creationId xmlns:a16="http://schemas.microsoft.com/office/drawing/2014/main" id="{1B256A8B-B416-4CA9-8771-48392FEF3D88}"/>
               </a:ext>
             </a:extLst>
           </p:cNvPr>
@@ -4857,8 +5186,8 @@
         </p:blipFill>
         <p:spPr>
           <a:xfrm>
-            <a:off x="4175906" y="3957123"/>
-            <a:ext cx="3123164" cy="1098995"/>
+            <a:off x="4439837" y="1642214"/>
+            <a:ext cx="6635437" cy="4167378"/>
           </a:xfrm>
           <a:prstGeom prst="rect">
             <a:avLst/>
@@ -4867,10 +5196,10 @@
       </p:pic>
       <p:sp>
         <p:nvSpPr>
-          <p:cNvPr id="3" name="TextBox 2">
+          <p:cNvPr id="2" name="TextBox 1">
             <a:extLst>
               <a:ext uri="{FF2B5EF4-FFF2-40B4-BE49-F238E27FC236}">
-                <a16:creationId xmlns:a16="http://schemas.microsoft.com/office/drawing/2014/main" id="{601EFCC3-E053-4D11-0B65-292DD2846A6C}"/>
+                <a16:creationId xmlns:a16="http://schemas.microsoft.com/office/drawing/2014/main" id="{8A987E28-1D05-52C4-D0F5-0A1B810B0689}"/>
               </a:ext>
             </a:extLst>
           </p:cNvPr>
@@ -4879,6 +5208,81 @@
         </p:nvSpPr>
         <p:spPr>
           <a:xfrm>
+            <a:off x="729720" y="2485910"/>
+            <a:ext cx="4055000" cy="2215991"/>
+          </a:xfrm>
+          <a:prstGeom prst="rect">
+            <a:avLst/>
+          </a:prstGeom>
+          <a:noFill/>
+        </p:spPr>
+        <p:txBody>
+          <a:bodyPr wrap="square" rtlCol="0">
+            <a:spAutoFit/>
+          </a:bodyPr>
+          <a:lstStyle/>
+          <a:p>
+            <a:r>
+              <a:rPr lang="nl-BE" sz="2400" dirty="0">
+                <a:latin typeface="Calibri" panose="020F0502020204030204" pitchFamily="34" charset="0"/>
+              </a:rPr>
+              <a:t>Error due to bias</a:t>
+            </a:r>
+          </a:p>
+          <a:p>
+            <a:endParaRPr lang="nl-BE" sz="2400" dirty="0">
+              <a:latin typeface="Calibri" panose="020F0502020204030204" pitchFamily="34" charset="0"/>
+            </a:endParaRPr>
+          </a:p>
+          <a:p>
+            <a:r>
+              <a:rPr lang="nl-BE" sz="2400" dirty="0">
+                <a:latin typeface="Calibri" panose="020F0502020204030204" pitchFamily="34" charset="0"/>
+              </a:rPr>
+              <a:t>Error due to variance</a:t>
+            </a:r>
+          </a:p>
+          <a:p>
+            <a:endParaRPr lang="nl-BE" sz="2400" dirty="0">
+              <a:latin typeface="Calibri" panose="020F0502020204030204" pitchFamily="34" charset="0"/>
+            </a:endParaRPr>
+          </a:p>
+          <a:p>
+            <a:r>
+              <a:rPr lang="nl-BE" sz="2400" dirty="0">
+                <a:latin typeface="Calibri" panose="020F0502020204030204" pitchFamily="34" charset="0"/>
+              </a:rPr>
+              <a:t>Irreducible error </a:t>
+            </a:r>
+            <a:endParaRPr lang="en-US" sz="2400" dirty="0">
+              <a:latin typeface="Calibri" panose="020F0502020204030204" pitchFamily="34" charset="0"/>
+            </a:endParaRPr>
+          </a:p>
+          <a:p>
+            <a:pPr marL="285750" indent="-285750">
+              <a:buFont typeface="Courier New" panose="02070309020205020404" pitchFamily="49" charset="0"/>
+              <a:buChar char="o"/>
+            </a:pPr>
+            <a:endParaRPr lang="en-US" dirty="0">
+              <a:latin typeface="Calibri" panose="020F0502020204030204" pitchFamily="34" charset="0"/>
+            </a:endParaRPr>
+          </a:p>
+        </p:txBody>
+      </p:sp>
+      <p:sp>
+        <p:nvSpPr>
+          <p:cNvPr id="4" name="TextBox 3">
+            <a:extLst>
+              <a:ext uri="{FF2B5EF4-FFF2-40B4-BE49-F238E27FC236}">
+                <a16:creationId xmlns:a16="http://schemas.microsoft.com/office/drawing/2014/main" id="{C5F47A19-F1CE-AE6F-E5F3-864B4EB25650}"/>
+              </a:ext>
+            </a:extLst>
+          </p:cNvPr>
+          <p:cNvSpPr txBox="1"/>
+          <p:nvPr/>
+        </p:nvSpPr>
+        <p:spPr>
+          <a:xfrm>
             <a:off x="241301" y="129804"/>
             <a:ext cx="11747500" cy="523220"/>
           </a:xfrm>
@@ -4899,7 +5303,7 @@
                 <a:ea typeface="Lato" panose="020B0604020202020204" pitchFamily="34" charset="0"/>
                 <a:cs typeface="Helvetica" panose="020B0604020202020204" pitchFamily="34" charset="0"/>
               </a:rPr>
-              <a:t>bagging</a:t>
+              <a:t>bias &lt;&gt; variance</a:t>
             </a:r>
             <a:endParaRPr lang="en-GB" sz="2800" dirty="0">
               <a:latin typeface="+mj-lt"/>
@@ -4912,7 +5316,7 @@
     </p:spTree>
     <p:extLst>
       <p:ext uri="{BB962C8B-B14F-4D97-AF65-F5344CB8AC3E}">
-        <p14:creationId xmlns:p14="http://schemas.microsoft.com/office/powerpoint/2010/main" val="2039997518"/>
+        <p14:creationId xmlns:p14="http://schemas.microsoft.com/office/powerpoint/2010/main" val="2553046411"/>
       </p:ext>
     </p:extLst>
   </p:cSld>
@@ -4939,6 +5343,526 @@
           <a:chExt cx="0" cy="0"/>
         </a:xfrm>
       </p:grpSpPr>
+      <p:pic>
+        <p:nvPicPr>
+          <p:cNvPr id="6" name="Picture 2" descr="Related image">
+            <a:extLst>
+              <a:ext uri="{FF2B5EF4-FFF2-40B4-BE49-F238E27FC236}">
+                <a16:creationId xmlns:a16="http://schemas.microsoft.com/office/drawing/2014/main" id="{05CE624E-428B-4EEF-B623-B7958FFB9FA2}"/>
+              </a:ext>
+            </a:extLst>
+          </p:cNvPr>
+          <p:cNvPicPr>
+            <a:picLocks noChangeAspect="1" noChangeArrowheads="1"/>
+          </p:cNvPicPr>
+          <p:nvPr/>
+        </p:nvPicPr>
+        <p:blipFill>
+          <a:blip r:embed="rId3">
+            <a:extLst>
+              <a:ext uri="{28A0092B-C50C-407E-A947-70E740481C1C}">
+                <a14:useLocalDpi xmlns:a14="http://schemas.microsoft.com/office/drawing/2010/main" val="0"/>
+              </a:ext>
+            </a:extLst>
+          </a:blip>
+          <a:srcRect/>
+          <a:stretch>
+            <a:fillRect/>
+          </a:stretch>
+        </p:blipFill>
+        <p:spPr bwMode="auto">
+          <a:xfrm>
+            <a:off x="2002219" y="1133853"/>
+            <a:ext cx="6892593" cy="5251182"/>
+          </a:xfrm>
+          <a:prstGeom prst="rect">
+            <a:avLst/>
+          </a:prstGeom>
+          <a:noFill/>
+          <a:extLst>
+            <a:ext uri="{909E8E84-426E-40DD-AFC4-6F175D3DCCD1}">
+              <a14:hiddenFill xmlns:a14="http://schemas.microsoft.com/office/drawing/2010/main">
+                <a:solidFill>
+                  <a:srgbClr val="FFFFFF"/>
+                </a:solidFill>
+              </a14:hiddenFill>
+            </a:ext>
+          </a:extLst>
+        </p:spPr>
+      </p:pic>
+      <p:sp>
+        <p:nvSpPr>
+          <p:cNvPr id="4" name="Arrow: Right 3">
+            <a:extLst>
+              <a:ext uri="{FF2B5EF4-FFF2-40B4-BE49-F238E27FC236}">
+                <a16:creationId xmlns:a16="http://schemas.microsoft.com/office/drawing/2014/main" id="{46CC7FD9-370E-4A18-99A5-08AD5B7FFA93}"/>
+              </a:ext>
+            </a:extLst>
+          </p:cNvPr>
+          <p:cNvSpPr/>
+          <p:nvPr/>
+        </p:nvSpPr>
+        <p:spPr>
+          <a:xfrm rot="16200000">
+            <a:off x="4074546" y="3808214"/>
+            <a:ext cx="1679029" cy="400337"/>
+          </a:xfrm>
+          <a:prstGeom prst="rightArrow">
+            <a:avLst/>
+          </a:prstGeom>
+          <a:solidFill>
+            <a:schemeClr val="accent1">
+              <a:lumMod val="20000"/>
+              <a:lumOff val="80000"/>
+            </a:schemeClr>
+          </a:solidFill>
+        </p:spPr>
+        <p:style>
+          <a:lnRef idx="2">
+            <a:schemeClr val="accent1">
+              <a:shade val="50000"/>
+            </a:schemeClr>
+          </a:lnRef>
+          <a:fillRef idx="1">
+            <a:schemeClr val="accent1"/>
+          </a:fillRef>
+          <a:effectRef idx="0">
+            <a:schemeClr val="accent1"/>
+          </a:effectRef>
+          <a:fontRef idx="minor">
+            <a:schemeClr val="lt1"/>
+          </a:fontRef>
+        </p:style>
+        <p:txBody>
+          <a:bodyPr rtlCol="0" anchor="ctr"/>
+          <a:lstStyle/>
+          <a:p>
+            <a:pPr algn="ctr"/>
+            <a:endParaRPr lang="nl-BE" dirty="0"/>
+          </a:p>
+        </p:txBody>
+      </p:sp>
+      <p:sp>
+        <p:nvSpPr>
+          <p:cNvPr id="8" name="Arrow: Right 7">
+            <a:extLst>
+              <a:ext uri="{FF2B5EF4-FFF2-40B4-BE49-F238E27FC236}">
+                <a16:creationId xmlns:a16="http://schemas.microsoft.com/office/drawing/2014/main" id="{B04A7BC4-D9C3-4283-AEF0-AC8E83FF44A2}"/>
+              </a:ext>
+            </a:extLst>
+          </p:cNvPr>
+          <p:cNvSpPr/>
+          <p:nvPr/>
+        </p:nvSpPr>
+        <p:spPr>
+          <a:xfrm rot="10800000">
+            <a:off x="5535484" y="2707256"/>
+            <a:ext cx="1679029" cy="400337"/>
+          </a:xfrm>
+          <a:prstGeom prst="rightArrow">
+            <a:avLst/>
+          </a:prstGeom>
+          <a:solidFill>
+            <a:schemeClr val="accent1">
+              <a:lumMod val="20000"/>
+              <a:lumOff val="80000"/>
+            </a:schemeClr>
+          </a:solidFill>
+        </p:spPr>
+        <p:style>
+          <a:lnRef idx="2">
+            <a:schemeClr val="accent1">
+              <a:shade val="50000"/>
+            </a:schemeClr>
+          </a:lnRef>
+          <a:fillRef idx="1">
+            <a:schemeClr val="accent1"/>
+          </a:fillRef>
+          <a:effectRef idx="0">
+            <a:schemeClr val="accent1"/>
+          </a:effectRef>
+          <a:fontRef idx="minor">
+            <a:schemeClr val="lt1"/>
+          </a:fontRef>
+        </p:style>
+        <p:txBody>
+          <a:bodyPr rtlCol="0" anchor="ctr"/>
+          <a:lstStyle/>
+          <a:p>
+            <a:pPr algn="ctr"/>
+            <a:endParaRPr lang="nl-BE"/>
+          </a:p>
+        </p:txBody>
+      </p:sp>
+      <p:sp>
+        <p:nvSpPr>
+          <p:cNvPr id="12" name="TextBox 11">
+            <a:extLst>
+              <a:ext uri="{FF2B5EF4-FFF2-40B4-BE49-F238E27FC236}">
+                <a16:creationId xmlns:a16="http://schemas.microsoft.com/office/drawing/2014/main" id="{225EAFEC-505F-40C0-AE44-A1698E0909D4}"/>
+              </a:ext>
+            </a:extLst>
+          </p:cNvPr>
+          <p:cNvSpPr txBox="1"/>
+          <p:nvPr/>
+        </p:nvSpPr>
+        <p:spPr>
+          <a:xfrm>
+            <a:off x="4390697" y="3759444"/>
+            <a:ext cx="1797269" cy="461665"/>
+          </a:xfrm>
+          <a:prstGeom prst="rect">
+            <a:avLst/>
+          </a:prstGeom>
+          <a:noFill/>
+        </p:spPr>
+        <p:txBody>
+          <a:bodyPr wrap="square" rtlCol="0">
+            <a:spAutoFit/>
+          </a:bodyPr>
+          <a:lstStyle/>
+          <a:p>
+            <a:r>
+              <a:rPr lang="nl-BE" sz="2400" dirty="0"/>
+              <a:t>bagging</a:t>
+            </a:r>
+          </a:p>
+        </p:txBody>
+      </p:sp>
+      <p:sp>
+        <p:nvSpPr>
+          <p:cNvPr id="13" name="TextBox 12">
+            <a:extLst>
+              <a:ext uri="{FF2B5EF4-FFF2-40B4-BE49-F238E27FC236}">
+                <a16:creationId xmlns:a16="http://schemas.microsoft.com/office/drawing/2014/main" id="{5FD9E6B6-2390-4BE6-AF89-C4B9B110FCAF}"/>
+              </a:ext>
+            </a:extLst>
+          </p:cNvPr>
+          <p:cNvSpPr txBox="1"/>
+          <p:nvPr/>
+        </p:nvSpPr>
+        <p:spPr>
+          <a:xfrm>
+            <a:off x="5741277" y="2645928"/>
+            <a:ext cx="1797269" cy="461665"/>
+          </a:xfrm>
+          <a:prstGeom prst="rect">
+            <a:avLst/>
+          </a:prstGeom>
+          <a:noFill/>
+        </p:spPr>
+        <p:txBody>
+          <a:bodyPr wrap="square" rtlCol="0">
+            <a:spAutoFit/>
+          </a:bodyPr>
+          <a:lstStyle/>
+          <a:p>
+            <a:r>
+              <a:rPr lang="nl-BE" sz="2400" dirty="0"/>
+              <a:t>boosting</a:t>
+            </a:r>
+          </a:p>
+        </p:txBody>
+      </p:sp>
+      <p:sp>
+        <p:nvSpPr>
+          <p:cNvPr id="3" name="TextBox 2">
+            <a:extLst>
+              <a:ext uri="{FF2B5EF4-FFF2-40B4-BE49-F238E27FC236}">
+                <a16:creationId xmlns:a16="http://schemas.microsoft.com/office/drawing/2014/main" id="{5FF1FDA0-20F2-FF74-FD4B-21B1B82F32A5}"/>
+              </a:ext>
+            </a:extLst>
+          </p:cNvPr>
+          <p:cNvSpPr txBox="1"/>
+          <p:nvPr/>
+        </p:nvSpPr>
+        <p:spPr>
+          <a:xfrm>
+            <a:off x="241301" y="129804"/>
+            <a:ext cx="11747500" cy="523220"/>
+          </a:xfrm>
+          <a:prstGeom prst="rect">
+            <a:avLst/>
+          </a:prstGeom>
+          <a:noFill/>
+        </p:spPr>
+        <p:txBody>
+          <a:bodyPr wrap="square" rtlCol="0">
+            <a:spAutoFit/>
+          </a:bodyPr>
+          <a:lstStyle/>
+          <a:p>
+            <a:r>
+              <a:rPr lang="en-US" sz="2800" dirty="0">
+                <a:latin typeface="+mj-lt"/>
+                <a:ea typeface="Lato" panose="020B0604020202020204" pitchFamily="34" charset="0"/>
+                <a:cs typeface="Helvetica" panose="020B0604020202020204" pitchFamily="34" charset="0"/>
+              </a:rPr>
+              <a:t>bagging &lt;&gt; boosting</a:t>
+            </a:r>
+            <a:endParaRPr lang="en-GB" sz="2800" dirty="0">
+              <a:latin typeface="+mj-lt"/>
+              <a:ea typeface="Lato" panose="020B0604020202020204" pitchFamily="34" charset="0"/>
+              <a:cs typeface="Helvetica" panose="020B0604020202020204" pitchFamily="34" charset="0"/>
+            </a:endParaRPr>
+          </a:p>
+        </p:txBody>
+      </p:sp>
+    </p:spTree>
+    <p:extLst>
+      <p:ext uri="{BB962C8B-B14F-4D97-AF65-F5344CB8AC3E}">
+        <p14:creationId xmlns:p14="http://schemas.microsoft.com/office/powerpoint/2010/main" val="3125656099"/>
+      </p:ext>
+    </p:extLst>
+  </p:cSld>
+  <p:clrMapOvr>
+    <a:masterClrMapping/>
+  </p:clrMapOvr>
+</p:sld>
+</file>
+
+<file path=ppt/slides/slide12.xml><?xml version="1.0" encoding="utf-8"?>
+<p:sld xmlns:a="http://schemas.openxmlformats.org/drawingml/2006/main" xmlns:r="http://schemas.openxmlformats.org/officeDocument/2006/relationships" xmlns:p="http://schemas.openxmlformats.org/presentationml/2006/main">
+  <p:cSld>
+    <p:spTree>
+      <p:nvGrpSpPr>
+        <p:cNvPr id="1" name=""/>
+        <p:cNvGrpSpPr/>
+        <p:nvPr/>
+      </p:nvGrpSpPr>
+      <p:grpSpPr>
+        <a:xfrm>
+          <a:off x="0" y="0"/>
+          <a:ext cx="0" cy="0"/>
+          <a:chOff x="0" y="0"/>
+          <a:chExt cx="0" cy="0"/>
+        </a:xfrm>
+      </p:grpSpPr>
+      <p:sp>
+        <p:nvSpPr>
+          <p:cNvPr id="5" name="TextBox 4"/>
+          <p:cNvSpPr txBox="1"/>
+          <p:nvPr/>
+        </p:nvSpPr>
+        <p:spPr>
+          <a:xfrm>
+            <a:off x="1172211" y="1599995"/>
+            <a:ext cx="9130555" cy="2246769"/>
+          </a:xfrm>
+          <a:prstGeom prst="rect">
+            <a:avLst/>
+          </a:prstGeom>
+          <a:noFill/>
+        </p:spPr>
+        <p:txBody>
+          <a:bodyPr wrap="square" rtlCol="0">
+            <a:spAutoFit/>
+          </a:bodyPr>
+          <a:lstStyle/>
+          <a:p>
+            <a:pPr marL="342900" indent="-342900">
+              <a:buFont typeface="Courier New" panose="02070309020205020404" pitchFamily="49" charset="0"/>
+              <a:buChar char="o"/>
+            </a:pPr>
+            <a:r>
+              <a:rPr lang="en-US" sz="2000" dirty="0">
+                <a:latin typeface="Calibri" panose="020F0502020204030204" pitchFamily="34" charset="0"/>
+              </a:rPr>
+              <a:t>Simulate the notion of different train set samples:</a:t>
+            </a:r>
+          </a:p>
+          <a:p>
+            <a:pPr marL="342900" indent="-342900">
+              <a:buFont typeface="Courier New" panose="02070309020205020404" pitchFamily="49" charset="0"/>
+              <a:buChar char="o"/>
+            </a:pPr>
+            <a:endParaRPr lang="en-US" sz="2000" dirty="0">
+              <a:latin typeface="Calibri" panose="020F0502020204030204" pitchFamily="34" charset="0"/>
+            </a:endParaRPr>
+          </a:p>
+          <a:p>
+            <a:pPr marL="1371600" lvl="2" indent="-457200">
+              <a:buFont typeface="+mj-lt"/>
+              <a:buAutoNum type="arabicPeriod"/>
+            </a:pPr>
+            <a:r>
+              <a:rPr lang="en-US" sz="2000" dirty="0">
+                <a:latin typeface="Calibri" panose="020F0502020204030204" pitchFamily="34" charset="0"/>
+              </a:rPr>
+              <a:t>sample data points from train set to create new train set</a:t>
+            </a:r>
+          </a:p>
+          <a:p>
+            <a:pPr marL="1371600" lvl="2" indent="-457200">
+              <a:buFont typeface="+mj-lt"/>
+              <a:buAutoNum type="arabicPeriod"/>
+            </a:pPr>
+            <a:r>
+              <a:rPr lang="en-US" sz="2000" dirty="0">
+                <a:latin typeface="Calibri" panose="020F0502020204030204" pitchFamily="34" charset="0"/>
+              </a:rPr>
+              <a:t>fit low bias high variance model on new train set</a:t>
+            </a:r>
+          </a:p>
+          <a:p>
+            <a:pPr marL="1371600" lvl="2" indent="-457200">
+              <a:buFont typeface="+mj-lt"/>
+              <a:buAutoNum type="arabicPeriod"/>
+            </a:pPr>
+            <a:r>
+              <a:rPr lang="en-US" sz="2000" dirty="0">
+                <a:latin typeface="Calibri" panose="020F0502020204030204" pitchFamily="34" charset="0"/>
+              </a:rPr>
+              <a:t>repeat steps (1) and (2) </a:t>
+            </a:r>
+            <a:r>
+              <a:rPr lang="en-US" sz="2000" i="1" dirty="0">
+                <a:latin typeface="Calibri" panose="020F0502020204030204" pitchFamily="34" charset="0"/>
+              </a:rPr>
+              <a:t>T</a:t>
+            </a:r>
+            <a:r>
+              <a:rPr lang="en-US" sz="2000" dirty="0">
+                <a:latin typeface="Calibri" panose="020F0502020204030204" pitchFamily="34" charset="0"/>
+              </a:rPr>
+              <a:t> times</a:t>
+            </a:r>
+          </a:p>
+          <a:p>
+            <a:pPr marL="1371600" lvl="2" indent="-457200">
+              <a:buFont typeface="+mj-lt"/>
+              <a:buAutoNum type="arabicPeriod"/>
+            </a:pPr>
+            <a:r>
+              <a:rPr lang="en-US" sz="2000" dirty="0">
+                <a:latin typeface="Calibri" panose="020F0502020204030204" pitchFamily="34" charset="0"/>
+              </a:rPr>
+              <a:t>average the predictions of the </a:t>
+            </a:r>
+            <a:r>
+              <a:rPr lang="en-US" sz="2000" i="1" dirty="0">
+                <a:latin typeface="Calibri" panose="020F0502020204030204" pitchFamily="34" charset="0"/>
+              </a:rPr>
+              <a:t>T</a:t>
+            </a:r>
+            <a:r>
+              <a:rPr lang="en-US" sz="2000" dirty="0">
+                <a:latin typeface="Calibri" panose="020F0502020204030204" pitchFamily="34" charset="0"/>
+              </a:rPr>
+              <a:t> models  </a:t>
+            </a:r>
+          </a:p>
+          <a:p>
+            <a:endParaRPr lang="nl-BE" sz="2000" dirty="0">
+              <a:latin typeface="Calibri" panose="020F0502020204030204" pitchFamily="34" charset="0"/>
+            </a:endParaRPr>
+          </a:p>
+        </p:txBody>
+      </p:sp>
+      <p:pic>
+        <p:nvPicPr>
+          <p:cNvPr id="6" name="Picture 5">
+            <a:extLst>
+              <a:ext uri="{FF2B5EF4-FFF2-40B4-BE49-F238E27FC236}">
+                <a16:creationId xmlns:a16="http://schemas.microsoft.com/office/drawing/2014/main" id="{0249A3C4-5E88-4059-831F-EFBC517E5ACF}"/>
+              </a:ext>
+            </a:extLst>
+          </p:cNvPr>
+          <p:cNvPicPr>
+            <a:picLocks noChangeAspect="1"/>
+          </p:cNvPicPr>
+          <p:nvPr/>
+        </p:nvPicPr>
+        <p:blipFill>
+          <a:blip r:embed="rId3"/>
+          <a:stretch>
+            <a:fillRect/>
+          </a:stretch>
+        </p:blipFill>
+        <p:spPr>
+          <a:xfrm>
+            <a:off x="4175906" y="3957123"/>
+            <a:ext cx="3123164" cy="1098995"/>
+          </a:xfrm>
+          <a:prstGeom prst="rect">
+            <a:avLst/>
+          </a:prstGeom>
+        </p:spPr>
+      </p:pic>
+      <p:sp>
+        <p:nvSpPr>
+          <p:cNvPr id="3" name="TextBox 2">
+            <a:extLst>
+              <a:ext uri="{FF2B5EF4-FFF2-40B4-BE49-F238E27FC236}">
+                <a16:creationId xmlns:a16="http://schemas.microsoft.com/office/drawing/2014/main" id="{601EFCC3-E053-4D11-0B65-292DD2846A6C}"/>
+              </a:ext>
+            </a:extLst>
+          </p:cNvPr>
+          <p:cNvSpPr txBox="1"/>
+          <p:nvPr/>
+        </p:nvSpPr>
+        <p:spPr>
+          <a:xfrm>
+            <a:off x="241301" y="129804"/>
+            <a:ext cx="11747500" cy="523220"/>
+          </a:xfrm>
+          <a:prstGeom prst="rect">
+            <a:avLst/>
+          </a:prstGeom>
+          <a:noFill/>
+        </p:spPr>
+        <p:txBody>
+          <a:bodyPr wrap="square" rtlCol="0">
+            <a:spAutoFit/>
+          </a:bodyPr>
+          <a:lstStyle/>
+          <a:p>
+            <a:r>
+              <a:rPr lang="en-US" sz="2800" dirty="0">
+                <a:latin typeface="+mj-lt"/>
+                <a:ea typeface="Lato" panose="020B0604020202020204" pitchFamily="34" charset="0"/>
+                <a:cs typeface="Helvetica" panose="020B0604020202020204" pitchFamily="34" charset="0"/>
+              </a:rPr>
+              <a:t>bagging</a:t>
+            </a:r>
+            <a:endParaRPr lang="en-GB" sz="2800" dirty="0">
+              <a:latin typeface="+mj-lt"/>
+              <a:ea typeface="Lato" panose="020B0604020202020204" pitchFamily="34" charset="0"/>
+              <a:cs typeface="Helvetica" panose="020B0604020202020204" pitchFamily="34" charset="0"/>
+            </a:endParaRPr>
+          </a:p>
+        </p:txBody>
+      </p:sp>
+    </p:spTree>
+    <p:extLst>
+      <p:ext uri="{BB962C8B-B14F-4D97-AF65-F5344CB8AC3E}">
+        <p14:creationId xmlns:p14="http://schemas.microsoft.com/office/powerpoint/2010/main" val="2039997518"/>
+      </p:ext>
+    </p:extLst>
+  </p:cSld>
+  <p:clrMapOvr>
+    <a:masterClrMapping/>
+  </p:clrMapOvr>
+</p:sld>
+</file>
+
+<file path=ppt/slides/slide13.xml><?xml version="1.0" encoding="utf-8"?>
+<p:sld xmlns:a="http://schemas.openxmlformats.org/drawingml/2006/main" xmlns:r="http://schemas.openxmlformats.org/officeDocument/2006/relationships" xmlns:p="http://schemas.openxmlformats.org/presentationml/2006/main">
+  <p:cSld>
+    <p:spTree>
+      <p:nvGrpSpPr>
+        <p:cNvPr id="1" name=""/>
+        <p:cNvGrpSpPr/>
+        <p:nvPr/>
+      </p:nvGrpSpPr>
+      <p:grpSpPr>
+        <a:xfrm>
+          <a:off x="0" y="0"/>
+          <a:ext cx="0" cy="0"/>
+          <a:chOff x="0" y="0"/>
+          <a:chExt cx="0" cy="0"/>
+        </a:xfrm>
+      </p:grpSpPr>
       <p:sp>
         <p:nvSpPr>
           <p:cNvPr id="6" name="TextBox 5">
@@ -5193,7 +6117,7 @@
 </p:sld>
 </file>
 
-<file path=ppt/slides/slide12.xml><?xml version="1.0" encoding="utf-8"?>
+<file path=ppt/slides/slide14.xml><?xml version="1.0" encoding="utf-8"?>
 <p:sld xmlns:a="http://schemas.openxmlformats.org/drawingml/2006/main" xmlns:r="http://schemas.openxmlformats.org/officeDocument/2006/relationships" xmlns:p="http://schemas.openxmlformats.org/presentationml/2006/main">
   <p:cSld>
     <p:spTree>
@@ -5525,7 +6449,7 @@
 </p:sld>
 </file>
 
-<file path=ppt/slides/slide13.xml><?xml version="1.0" encoding="utf-8"?>
+<file path=ppt/slides/slide15.xml><?xml version="1.0" encoding="utf-8"?>
 <p:sld xmlns:a="http://schemas.openxmlformats.org/drawingml/2006/main" xmlns:r="http://schemas.openxmlformats.org/officeDocument/2006/relationships" xmlns:p="http://schemas.openxmlformats.org/presentationml/2006/main">
   <p:cSld>
     <p:spTree>
@@ -5691,7 +6615,7 @@
 </p:sld>
 </file>
 
-<file path=ppt/slides/slide14.xml><?xml version="1.0" encoding="utf-8"?>
+<file path=ppt/slides/slide16.xml><?xml version="1.0" encoding="utf-8"?>
 <p:sld xmlns:a="http://schemas.openxmlformats.org/drawingml/2006/main" xmlns:r="http://schemas.openxmlformats.org/officeDocument/2006/relationships" xmlns:p="http://schemas.openxmlformats.org/presentationml/2006/main">
   <p:cSld>
     <p:spTree>
@@ -5885,7 +6809,7 @@
 </p:sld>
 </file>
 
-<file path=ppt/slides/slide15.xml><?xml version="1.0" encoding="utf-8"?>
+<file path=ppt/slides/slide17.xml><?xml version="1.0" encoding="utf-8"?>
 <p:sld xmlns:a="http://schemas.openxmlformats.org/drawingml/2006/main" xmlns:r="http://schemas.openxmlformats.org/officeDocument/2006/relationships" xmlns:p="http://schemas.openxmlformats.org/presentationml/2006/main">
   <p:cSld>
     <p:spTree>
@@ -6027,6 +6951,301 @@
 </p:sld>
 </file>
 
+<file path=ppt/slides/slide18.xml><?xml version="1.0" encoding="utf-8"?>
+<p:sld xmlns:a="http://schemas.openxmlformats.org/drawingml/2006/main" xmlns:r="http://schemas.openxmlformats.org/officeDocument/2006/relationships" xmlns:p="http://schemas.openxmlformats.org/presentationml/2006/main" show="0">
+  <p:cSld>
+    <p:spTree>
+      <p:nvGrpSpPr>
+        <p:cNvPr id="1" name=""/>
+        <p:cNvGrpSpPr/>
+        <p:nvPr/>
+      </p:nvGrpSpPr>
+      <p:grpSpPr>
+        <a:xfrm>
+          <a:off x="0" y="0"/>
+          <a:ext cx="0" cy="0"/>
+          <a:chOff x="0" y="0"/>
+          <a:chExt cx="0" cy="0"/>
+        </a:xfrm>
+      </p:grpSpPr>
+      <p:sp>
+        <p:nvSpPr>
+          <p:cNvPr id="2" name="TextBox 1">
+            <a:extLst>
+              <a:ext uri="{FF2B5EF4-FFF2-40B4-BE49-F238E27FC236}">
+                <a16:creationId xmlns:a16="http://schemas.microsoft.com/office/drawing/2014/main" id="{FF285DFA-A873-EAEE-E801-AD6394974CF6}"/>
+              </a:ext>
+            </a:extLst>
+          </p:cNvPr>
+          <p:cNvSpPr txBox="1"/>
+          <p:nvPr/>
+        </p:nvSpPr>
+        <p:spPr>
+          <a:xfrm>
+            <a:off x="241301" y="129804"/>
+            <a:ext cx="11747500" cy="523220"/>
+          </a:xfrm>
+          <a:prstGeom prst="rect">
+            <a:avLst/>
+          </a:prstGeom>
+          <a:noFill/>
+        </p:spPr>
+        <p:txBody>
+          <a:bodyPr wrap="square" rtlCol="0">
+            <a:spAutoFit/>
+          </a:bodyPr>
+          <a:lstStyle/>
+          <a:p>
+            <a:r>
+              <a:rPr lang="en-US" sz="2800" dirty="0">
+                <a:latin typeface="+mj-lt"/>
+                <a:ea typeface="Lato" panose="020B0604020202020204" pitchFamily="34" charset="0"/>
+                <a:cs typeface="Helvetica" panose="020B0604020202020204" pitchFamily="34" charset="0"/>
+              </a:rPr>
+              <a:t>Following slides will be skipped, only for those very interested</a:t>
+            </a:r>
+            <a:endParaRPr lang="en-GB" sz="2800" dirty="0">
+              <a:latin typeface="+mj-lt"/>
+              <a:ea typeface="Lato" panose="020B0604020202020204" pitchFamily="34" charset="0"/>
+              <a:cs typeface="Helvetica" panose="020B0604020202020204" pitchFamily="34" charset="0"/>
+            </a:endParaRPr>
+          </a:p>
+        </p:txBody>
+      </p:sp>
+    </p:spTree>
+    <p:extLst>
+      <p:ext uri="{BB962C8B-B14F-4D97-AF65-F5344CB8AC3E}">
+        <p14:creationId xmlns:p14="http://schemas.microsoft.com/office/powerpoint/2010/main" val="3436499605"/>
+      </p:ext>
+    </p:extLst>
+  </p:cSld>
+  <p:clrMapOvr>
+    <a:masterClrMapping/>
+  </p:clrMapOvr>
+</p:sld>
+</file>
+
+<file path=ppt/slides/slide19.xml><?xml version="1.0" encoding="utf-8"?>
+<p:sld xmlns:a="http://schemas.openxmlformats.org/drawingml/2006/main" xmlns:r="http://schemas.openxmlformats.org/officeDocument/2006/relationships" xmlns:p="http://schemas.openxmlformats.org/presentationml/2006/main" show="0">
+  <p:cSld>
+    <p:spTree>
+      <p:nvGrpSpPr>
+        <p:cNvPr id="1" name=""/>
+        <p:cNvGrpSpPr/>
+        <p:nvPr/>
+      </p:nvGrpSpPr>
+      <p:grpSpPr>
+        <a:xfrm>
+          <a:off x="0" y="0"/>
+          <a:ext cx="0" cy="0"/>
+          <a:chOff x="0" y="0"/>
+          <a:chExt cx="0" cy="0"/>
+        </a:xfrm>
+      </p:grpSpPr>
+      <p:pic>
+        <p:nvPicPr>
+          <p:cNvPr id="3" name="Picture 2">
+            <a:extLst>
+              <a:ext uri="{FF2B5EF4-FFF2-40B4-BE49-F238E27FC236}">
+                <a16:creationId xmlns:a16="http://schemas.microsoft.com/office/drawing/2014/main" id="{FD15CDA8-0348-442D-B59A-21F539FCD048}"/>
+              </a:ext>
+            </a:extLst>
+          </p:cNvPr>
+          <p:cNvPicPr>
+            <a:picLocks noChangeAspect="1"/>
+          </p:cNvPicPr>
+          <p:nvPr/>
+        </p:nvPicPr>
+        <p:blipFill>
+          <a:blip r:embed="rId3"/>
+          <a:stretch>
+            <a:fillRect/>
+          </a:stretch>
+        </p:blipFill>
+        <p:spPr>
+          <a:xfrm>
+            <a:off x="1434877" y="1190386"/>
+            <a:ext cx="7985020" cy="3522979"/>
+          </a:xfrm>
+          <a:prstGeom prst="rect">
+            <a:avLst/>
+          </a:prstGeom>
+        </p:spPr>
+      </p:pic>
+      <p:pic>
+        <p:nvPicPr>
+          <p:cNvPr id="6" name="Picture 5">
+            <a:extLst>
+              <a:ext uri="{FF2B5EF4-FFF2-40B4-BE49-F238E27FC236}">
+                <a16:creationId xmlns:a16="http://schemas.microsoft.com/office/drawing/2014/main" id="{C24B8D57-B84E-4A0B-B49C-E189265A0953}"/>
+              </a:ext>
+            </a:extLst>
+          </p:cNvPr>
+          <p:cNvPicPr>
+            <a:picLocks noChangeAspect="1"/>
+          </p:cNvPicPr>
+          <p:nvPr/>
+        </p:nvPicPr>
+        <p:blipFill>
+          <a:blip r:embed="rId4"/>
+          <a:stretch>
+            <a:fillRect/>
+          </a:stretch>
+        </p:blipFill>
+        <p:spPr>
+          <a:xfrm>
+            <a:off x="4639487" y="4984220"/>
+            <a:ext cx="2821276" cy="1180875"/>
+          </a:xfrm>
+          <a:prstGeom prst="rect">
+            <a:avLst/>
+          </a:prstGeom>
+        </p:spPr>
+      </p:pic>
+      <p:pic>
+        <p:nvPicPr>
+          <p:cNvPr id="4" name="Picture 3">
+            <a:extLst>
+              <a:ext uri="{FF2B5EF4-FFF2-40B4-BE49-F238E27FC236}">
+                <a16:creationId xmlns:a16="http://schemas.microsoft.com/office/drawing/2014/main" id="{5E78D335-2BAC-4334-951C-9B16ABF226B8}"/>
+              </a:ext>
+            </a:extLst>
+          </p:cNvPr>
+          <p:cNvPicPr>
+            <a:picLocks noChangeAspect="1"/>
+          </p:cNvPicPr>
+          <p:nvPr/>
+        </p:nvPicPr>
+        <p:blipFill>
+          <a:blip r:embed="rId5"/>
+          <a:stretch>
+            <a:fillRect/>
+          </a:stretch>
+        </p:blipFill>
+        <p:spPr>
+          <a:xfrm>
+            <a:off x="8335935" y="1190386"/>
+            <a:ext cx="1659404" cy="464633"/>
+          </a:xfrm>
+          <a:prstGeom prst="rect">
+            <a:avLst/>
+          </a:prstGeom>
+        </p:spPr>
+      </p:pic>
+      <p:sp>
+        <p:nvSpPr>
+          <p:cNvPr id="5" name="Rectangle 4">
+            <a:extLst>
+              <a:ext uri="{FF2B5EF4-FFF2-40B4-BE49-F238E27FC236}">
+                <a16:creationId xmlns:a16="http://schemas.microsoft.com/office/drawing/2014/main" id="{CEE6BB88-E2B2-480A-AAD4-7F94FA38CBD5}"/>
+              </a:ext>
+            </a:extLst>
+          </p:cNvPr>
+          <p:cNvSpPr/>
+          <p:nvPr/>
+        </p:nvSpPr>
+        <p:spPr>
+          <a:xfrm>
+            <a:off x="8150772" y="1001110"/>
+            <a:ext cx="1954925" cy="764628"/>
+          </a:xfrm>
+          <a:prstGeom prst="rect">
+            <a:avLst/>
+          </a:prstGeom>
+          <a:noFill/>
+          <a:ln>
+            <a:solidFill>
+              <a:srgbClr val="FF0000"/>
+            </a:solidFill>
+          </a:ln>
+        </p:spPr>
+        <p:style>
+          <a:lnRef idx="2">
+            <a:schemeClr val="accent1">
+              <a:shade val="50000"/>
+            </a:schemeClr>
+          </a:lnRef>
+          <a:fillRef idx="1">
+            <a:schemeClr val="accent1"/>
+          </a:fillRef>
+          <a:effectRef idx="0">
+            <a:schemeClr val="accent1"/>
+          </a:effectRef>
+          <a:fontRef idx="minor">
+            <a:schemeClr val="lt1"/>
+          </a:fontRef>
+        </p:style>
+        <p:txBody>
+          <a:bodyPr rtlCol="0" anchor="ctr"/>
+          <a:lstStyle/>
+          <a:p>
+            <a:pPr algn="ctr"/>
+            <a:endParaRPr lang="nl-BE" dirty="0"/>
+          </a:p>
+        </p:txBody>
+      </p:sp>
+      <p:sp>
+        <p:nvSpPr>
+          <p:cNvPr id="7" name="TextBox 6">
+            <a:extLst>
+              <a:ext uri="{FF2B5EF4-FFF2-40B4-BE49-F238E27FC236}">
+                <a16:creationId xmlns:a16="http://schemas.microsoft.com/office/drawing/2014/main" id="{120110C1-B22B-FF93-BE2B-5779077CA275}"/>
+              </a:ext>
+            </a:extLst>
+          </p:cNvPr>
+          <p:cNvSpPr txBox="1"/>
+          <p:nvPr/>
+        </p:nvSpPr>
+        <p:spPr>
+          <a:xfrm>
+            <a:off x="241301" y="129804"/>
+            <a:ext cx="11747500" cy="523220"/>
+          </a:xfrm>
+          <a:prstGeom prst="rect">
+            <a:avLst/>
+          </a:prstGeom>
+          <a:noFill/>
+        </p:spPr>
+        <p:txBody>
+          <a:bodyPr wrap="square" rtlCol="0">
+            <a:spAutoFit/>
+          </a:bodyPr>
+          <a:lstStyle/>
+          <a:p>
+            <a:r>
+              <a:rPr lang="en-US" sz="2800" dirty="0">
+                <a:ea typeface="Lato" panose="020B0604020202020204" pitchFamily="34" charset="0"/>
+                <a:cs typeface="Helvetica" panose="020B0604020202020204" pitchFamily="34" charset="0"/>
+              </a:rPr>
+              <a:t>Boosting: </a:t>
+            </a:r>
+            <a:r>
+              <a:rPr lang="en-US" sz="2800" dirty="0" err="1">
+                <a:ea typeface="Lato" panose="020B0604020202020204" pitchFamily="34" charset="0"/>
+                <a:cs typeface="Helvetica" panose="020B0604020202020204" pitchFamily="34" charset="0"/>
+              </a:rPr>
+              <a:t>Adaboost</a:t>
+            </a:r>
+            <a:endParaRPr lang="en-GB" sz="2800" dirty="0">
+              <a:ea typeface="Lato" panose="020B0604020202020204" pitchFamily="34" charset="0"/>
+              <a:cs typeface="Helvetica" panose="020B0604020202020204" pitchFamily="34" charset="0"/>
+            </a:endParaRPr>
+          </a:p>
+        </p:txBody>
+      </p:sp>
+    </p:spTree>
+    <p:extLst>
+      <p:ext uri="{BB962C8B-B14F-4D97-AF65-F5344CB8AC3E}">
+        <p14:creationId xmlns:p14="http://schemas.microsoft.com/office/powerpoint/2010/main" val="419804066"/>
+      </p:ext>
+    </p:extLst>
+  </p:cSld>
+  <p:clrMapOvr>
+    <a:masterClrMapping/>
+  </p:clrMapOvr>
+</p:sld>
+</file>
+
 <file path=ppt/slides/slide2.xml><?xml version="1.0" encoding="utf-8"?>
 <p:sld xmlns:a="http://schemas.openxmlformats.org/drawingml/2006/main" xmlns:r="http://schemas.openxmlformats.org/officeDocument/2006/relationships" xmlns:p="http://schemas.openxmlformats.org/presentationml/2006/main">
   <p:cSld>
@@ -6044,167 +7263,458 @@
           <a:chExt cx="0" cy="0"/>
         </a:xfrm>
       </p:grpSpPr>
+      <p:sp>
+        <p:nvSpPr>
+          <p:cNvPr id="5" name="TextBox 4">
+            <a:extLst>
+              <a:ext uri="{FF2B5EF4-FFF2-40B4-BE49-F238E27FC236}">
+                <a16:creationId xmlns:a16="http://schemas.microsoft.com/office/drawing/2014/main" id="{0E2CB1A6-46E1-FE3F-5EB3-4EDF592FBD9E}"/>
+              </a:ext>
+            </a:extLst>
+          </p:cNvPr>
+          <p:cNvSpPr txBox="1"/>
+          <p:nvPr/>
+        </p:nvSpPr>
+        <p:spPr>
+          <a:xfrm>
+            <a:off x="241301" y="129804"/>
+            <a:ext cx="11747500" cy="523220"/>
+          </a:xfrm>
+          <a:prstGeom prst="rect">
+            <a:avLst/>
+          </a:prstGeom>
+          <a:noFill/>
+        </p:spPr>
+        <p:txBody>
+          <a:bodyPr wrap="square" rtlCol="0">
+            <a:spAutoFit/>
+          </a:bodyPr>
+          <a:lstStyle/>
+          <a:p>
+            <a:r>
+              <a:rPr lang="en-US" sz="2800" dirty="0">
+                <a:latin typeface="+mj-lt"/>
+                <a:ea typeface="Lato" panose="020B0604020202020204" pitchFamily="34" charset="0"/>
+                <a:cs typeface="Helvetica" panose="020B0604020202020204" pitchFamily="34" charset="0"/>
+              </a:rPr>
+              <a:t>decision tree models</a:t>
+            </a:r>
+            <a:endParaRPr lang="en-GB" sz="2800" dirty="0">
+              <a:latin typeface="+mj-lt"/>
+              <a:ea typeface="Lato" panose="020B0604020202020204" pitchFamily="34" charset="0"/>
+              <a:cs typeface="Helvetica" panose="020B0604020202020204" pitchFamily="34" charset="0"/>
+            </a:endParaRPr>
+          </a:p>
+        </p:txBody>
+      </p:sp>
       <p:pic>
         <p:nvPicPr>
-          <p:cNvPr id="2" name="Picture 1"/>
+          <p:cNvPr id="1026" name="Picture 2">
+            <a:extLst>
+              <a:ext uri="{FF2B5EF4-FFF2-40B4-BE49-F238E27FC236}">
+                <a16:creationId xmlns:a16="http://schemas.microsoft.com/office/drawing/2014/main" id="{466F50F7-913E-E67D-09BF-3713A97EE9C3}"/>
+              </a:ext>
+            </a:extLst>
+          </p:cNvPr>
+          <p:cNvPicPr>
+            <a:picLocks noChangeAspect="1" noChangeArrowheads="1"/>
+          </p:cNvPicPr>
+          <p:nvPr/>
+        </p:nvPicPr>
+        <p:blipFill>
+          <a:blip r:embed="rId3">
+            <a:extLst>
+              <a:ext uri="{28A0092B-C50C-407E-A947-70E740481C1C}">
+                <a14:useLocalDpi xmlns:a14="http://schemas.microsoft.com/office/drawing/2010/main" val="0"/>
+              </a:ext>
+            </a:extLst>
+          </a:blip>
+          <a:srcRect/>
+          <a:stretch>
+            <a:fillRect/>
+          </a:stretch>
+        </p:blipFill>
+        <p:spPr bwMode="auto">
+          <a:xfrm>
+            <a:off x="6115051" y="2156055"/>
+            <a:ext cx="5894342" cy="4172985"/>
+          </a:xfrm>
+          <a:prstGeom prst="rect">
+            <a:avLst/>
+          </a:prstGeom>
+          <a:noFill/>
+          <a:extLst>
+            <a:ext uri="{909E8E84-426E-40DD-AFC4-6F175D3DCCD1}">
+              <a14:hiddenFill xmlns:a14="http://schemas.microsoft.com/office/drawing/2010/main">
+                <a:solidFill>
+                  <a:srgbClr val="FFFFFF"/>
+                </a:solidFill>
+              </a14:hiddenFill>
+            </a:ext>
+          </a:extLst>
+        </p:spPr>
+      </p:pic>
+      <p:pic>
+        <p:nvPicPr>
+          <p:cNvPr id="1028" name="Picture 4" descr="Entropy: How Decision Trees Make Decisions | by Sam T | Towards Data Science">
+            <a:extLst>
+              <a:ext uri="{FF2B5EF4-FFF2-40B4-BE49-F238E27FC236}">
+                <a16:creationId xmlns:a16="http://schemas.microsoft.com/office/drawing/2014/main" id="{A72BE986-0CB7-19BC-8F2C-A96A4AC020C3}"/>
+              </a:ext>
+            </a:extLst>
+          </p:cNvPr>
+          <p:cNvPicPr>
+            <a:picLocks noChangeAspect="1" noChangeArrowheads="1"/>
+          </p:cNvPicPr>
+          <p:nvPr/>
+        </p:nvPicPr>
+        <p:blipFill>
+          <a:blip r:embed="rId4">
+            <a:extLst>
+              <a:ext uri="{28A0092B-C50C-407E-A947-70E740481C1C}">
+                <a14:useLocalDpi xmlns:a14="http://schemas.microsoft.com/office/drawing/2010/main" val="0"/>
+              </a:ext>
+            </a:extLst>
+          </a:blip>
+          <a:srcRect/>
+          <a:stretch>
+            <a:fillRect/>
+          </a:stretch>
+        </p:blipFill>
+        <p:spPr bwMode="auto">
+          <a:xfrm>
+            <a:off x="810350" y="1084235"/>
+            <a:ext cx="5108363" cy="5029200"/>
+          </a:xfrm>
+          <a:prstGeom prst="rect">
+            <a:avLst/>
+          </a:prstGeom>
+          <a:noFill/>
+          <a:extLst>
+            <a:ext uri="{909E8E84-426E-40DD-AFC4-6F175D3DCCD1}">
+              <a14:hiddenFill xmlns:a14="http://schemas.microsoft.com/office/drawing/2010/main">
+                <a:solidFill>
+                  <a:srgbClr val="FFFFFF"/>
+                </a:solidFill>
+              </a14:hiddenFill>
+            </a:ext>
+          </a:extLst>
+        </p:spPr>
+      </p:pic>
+      <p:pic>
+        <p:nvPicPr>
+          <p:cNvPr id="1030" name="Picture 6">
+            <a:extLst>
+              <a:ext uri="{FF2B5EF4-FFF2-40B4-BE49-F238E27FC236}">
+                <a16:creationId xmlns:a16="http://schemas.microsoft.com/office/drawing/2014/main" id="{ED51A179-2E1F-A646-2D29-E4A17F721819}"/>
+              </a:ext>
+            </a:extLst>
+          </p:cNvPr>
+          <p:cNvPicPr>
+            <a:picLocks noChangeAspect="1" noChangeArrowheads="1"/>
+          </p:cNvPicPr>
+          <p:nvPr/>
+        </p:nvPicPr>
+        <p:blipFill>
+          <a:blip r:embed="rId5">
+            <a:extLst>
+              <a:ext uri="{28A0092B-C50C-407E-A947-70E740481C1C}">
+                <a14:useLocalDpi xmlns:a14="http://schemas.microsoft.com/office/drawing/2010/main" val="0"/>
+              </a:ext>
+            </a:extLst>
+          </a:blip>
+          <a:srcRect/>
+          <a:stretch>
+            <a:fillRect/>
+          </a:stretch>
+        </p:blipFill>
+        <p:spPr bwMode="auto">
+          <a:xfrm>
+            <a:off x="7421200" y="1178688"/>
+            <a:ext cx="3724275" cy="866775"/>
+          </a:xfrm>
+          <a:prstGeom prst="rect">
+            <a:avLst/>
+          </a:prstGeom>
+          <a:noFill/>
+          <a:extLst>
+            <a:ext uri="{909E8E84-426E-40DD-AFC4-6F175D3DCCD1}">
+              <a14:hiddenFill xmlns:a14="http://schemas.microsoft.com/office/drawing/2010/main">
+                <a:solidFill>
+                  <a:srgbClr val="FFFFFF"/>
+                </a:solidFill>
+              </a14:hiddenFill>
+            </a:ext>
+          </a:extLst>
+        </p:spPr>
+      </p:pic>
+      <p:pic>
+        <p:nvPicPr>
+          <p:cNvPr id="3" name="Picture 4" descr="Entropy: How Decision Trees Make Decisions | by Sam T | Towards Data Science">
+            <a:extLst>
+              <a:ext uri="{FF2B5EF4-FFF2-40B4-BE49-F238E27FC236}">
+                <a16:creationId xmlns:a16="http://schemas.microsoft.com/office/drawing/2014/main" id="{C1545E87-DE42-8760-8B88-D6A16C559900}"/>
+              </a:ext>
+            </a:extLst>
+          </p:cNvPr>
+          <p:cNvPicPr>
+            <a:picLocks noChangeAspect="1" noChangeArrowheads="1"/>
+          </p:cNvPicPr>
+          <p:nvPr/>
+        </p:nvPicPr>
+        <p:blipFill rotWithShape="1">
+          <a:blip r:embed="rId4">
+            <a:extLst>
+              <a:ext uri="{28A0092B-C50C-407E-A947-70E740481C1C}">
+                <a14:useLocalDpi xmlns:a14="http://schemas.microsoft.com/office/drawing/2010/main" val="0"/>
+              </a:ext>
+            </a:extLst>
+          </a:blip>
+          <a:srcRect l="57501" t="12746" r="38682" b="83617"/>
+          <a:stretch/>
+        </p:blipFill>
+        <p:spPr bwMode="auto">
+          <a:xfrm>
+            <a:off x="9159172" y="5919125"/>
+            <a:ext cx="194990" cy="182880"/>
+          </a:xfrm>
+          <a:prstGeom prst="rect">
+            <a:avLst/>
+          </a:prstGeom>
+          <a:noFill/>
+          <a:extLst>
+            <a:ext uri="{909E8E84-426E-40DD-AFC4-6F175D3DCCD1}">
+              <a14:hiddenFill xmlns:a14="http://schemas.microsoft.com/office/drawing/2010/main">
+                <a:solidFill>
+                  <a:srgbClr val="FFFFFF"/>
+                </a:solidFill>
+              </a14:hiddenFill>
+            </a:ext>
+          </a:extLst>
+        </p:spPr>
+      </p:pic>
+    </p:spTree>
+    <p:extLst>
+      <p:ext uri="{BB962C8B-B14F-4D97-AF65-F5344CB8AC3E}">
+        <p14:creationId xmlns:p14="http://schemas.microsoft.com/office/powerpoint/2010/main" val="4071848948"/>
+      </p:ext>
+    </p:extLst>
+  </p:cSld>
+  <p:clrMapOvr>
+    <a:masterClrMapping/>
+  </p:clrMapOvr>
+</p:sld>
+</file>
+
+<file path=ppt/slides/slide20.xml><?xml version="1.0" encoding="utf-8"?>
+<p:sld xmlns:a="http://schemas.openxmlformats.org/drawingml/2006/main" xmlns:r="http://schemas.openxmlformats.org/officeDocument/2006/relationships" xmlns:p="http://schemas.openxmlformats.org/presentationml/2006/main" show="0">
+  <p:cSld>
+    <p:spTree>
+      <p:nvGrpSpPr>
+        <p:cNvPr id="1" name=""/>
+        <p:cNvGrpSpPr/>
+        <p:nvPr/>
+      </p:nvGrpSpPr>
+      <p:grpSpPr>
+        <a:xfrm>
+          <a:off x="0" y="0"/>
+          <a:ext cx="0" cy="0"/>
+          <a:chOff x="0" y="0"/>
+          <a:chExt cx="0" cy="0"/>
+        </a:xfrm>
+      </p:grpSpPr>
+      <p:pic>
+        <p:nvPicPr>
+          <p:cNvPr id="1026" name="Picture 2" descr="https://upload.wikimedia.org/wikipedia/commons/thumb/c/c6/Exp.svg/800px-Exp.svg.png">
+            <a:extLst>
+              <a:ext uri="{FF2B5EF4-FFF2-40B4-BE49-F238E27FC236}">
+                <a16:creationId xmlns:a16="http://schemas.microsoft.com/office/drawing/2014/main" id="{8F729C84-87E1-492D-9EFE-34F46EF315E4}"/>
+              </a:ext>
+            </a:extLst>
+          </p:cNvPr>
+          <p:cNvPicPr>
+            <a:picLocks noChangeAspect="1" noChangeArrowheads="1"/>
+          </p:cNvPicPr>
+          <p:nvPr/>
+        </p:nvPicPr>
+        <p:blipFill>
+          <a:blip r:embed="rId2">
+            <a:extLst>
+              <a:ext uri="{28A0092B-C50C-407E-A947-70E740481C1C}">
+                <a14:useLocalDpi xmlns:a14="http://schemas.microsoft.com/office/drawing/2010/main" val="0"/>
+              </a:ext>
+            </a:extLst>
+          </a:blip>
+          <a:srcRect/>
+          <a:stretch>
+            <a:fillRect/>
+          </a:stretch>
+        </p:blipFill>
+        <p:spPr bwMode="auto">
+          <a:xfrm>
+            <a:off x="2637945" y="991695"/>
+            <a:ext cx="6708889" cy="5031667"/>
+          </a:xfrm>
+          <a:prstGeom prst="rect">
+            <a:avLst/>
+          </a:prstGeom>
+          <a:noFill/>
+          <a:extLst>
+            <a:ext uri="{909E8E84-426E-40DD-AFC4-6F175D3DCCD1}">
+              <a14:hiddenFill xmlns:a14="http://schemas.microsoft.com/office/drawing/2010/main">
+                <a:solidFill>
+                  <a:srgbClr val="FFFFFF"/>
+                </a:solidFill>
+              </a14:hiddenFill>
+            </a:ext>
+          </a:extLst>
+        </p:spPr>
+      </p:pic>
+      <p:sp>
+        <p:nvSpPr>
+          <p:cNvPr id="2" name="TextBox 1">
+            <a:extLst>
+              <a:ext uri="{FF2B5EF4-FFF2-40B4-BE49-F238E27FC236}">
+                <a16:creationId xmlns:a16="http://schemas.microsoft.com/office/drawing/2014/main" id="{BECD9745-B800-F7C4-2DB5-6BF8CA71E08B}"/>
+              </a:ext>
+            </a:extLst>
+          </p:cNvPr>
+          <p:cNvSpPr txBox="1"/>
+          <p:nvPr/>
+        </p:nvSpPr>
+        <p:spPr>
+          <a:xfrm>
+            <a:off x="241301" y="129804"/>
+            <a:ext cx="11747500" cy="523220"/>
+          </a:xfrm>
+          <a:prstGeom prst="rect">
+            <a:avLst/>
+          </a:prstGeom>
+          <a:noFill/>
+        </p:spPr>
+        <p:txBody>
+          <a:bodyPr wrap="square" rtlCol="0">
+            <a:spAutoFit/>
+          </a:bodyPr>
+          <a:lstStyle/>
+          <a:p>
+            <a:r>
+              <a:rPr lang="en-US" sz="2800" dirty="0">
+                <a:ea typeface="Lato" panose="020B0604020202020204" pitchFamily="34" charset="0"/>
+                <a:cs typeface="Helvetica" panose="020B0604020202020204" pitchFamily="34" charset="0"/>
+              </a:rPr>
+              <a:t>Boosting: </a:t>
+            </a:r>
+            <a:r>
+              <a:rPr lang="en-US" sz="2800" dirty="0" err="1">
+                <a:ea typeface="Lato" panose="020B0604020202020204" pitchFamily="34" charset="0"/>
+                <a:cs typeface="Helvetica" panose="020B0604020202020204" pitchFamily="34" charset="0"/>
+              </a:rPr>
+              <a:t>Adaboost</a:t>
+            </a:r>
+            <a:endParaRPr lang="en-GB" sz="2800" dirty="0">
+              <a:ea typeface="Lato" panose="020B0604020202020204" pitchFamily="34" charset="0"/>
+              <a:cs typeface="Helvetica" panose="020B0604020202020204" pitchFamily="34" charset="0"/>
+            </a:endParaRPr>
+          </a:p>
+        </p:txBody>
+      </p:sp>
+    </p:spTree>
+    <p:extLst>
+      <p:ext uri="{BB962C8B-B14F-4D97-AF65-F5344CB8AC3E}">
+        <p14:creationId xmlns:p14="http://schemas.microsoft.com/office/powerpoint/2010/main" val="3516859904"/>
+      </p:ext>
+    </p:extLst>
+  </p:cSld>
+  <p:clrMapOvr>
+    <a:masterClrMapping/>
+  </p:clrMapOvr>
+</p:sld>
+</file>
+
+<file path=ppt/slides/slide21.xml><?xml version="1.0" encoding="utf-8"?>
+<p:sld xmlns:a="http://schemas.openxmlformats.org/drawingml/2006/main" xmlns:r="http://schemas.openxmlformats.org/officeDocument/2006/relationships" xmlns:p="http://schemas.openxmlformats.org/presentationml/2006/main" show="0">
+  <p:cSld>
+    <p:spTree>
+      <p:nvGrpSpPr>
+        <p:cNvPr id="1" name=""/>
+        <p:cNvGrpSpPr/>
+        <p:nvPr/>
+      </p:nvGrpSpPr>
+      <p:grpSpPr>
+        <a:xfrm>
+          <a:off x="0" y="0"/>
+          <a:ext cx="0" cy="0"/>
+          <a:chOff x="0" y="0"/>
+          <a:chExt cx="0" cy="0"/>
+        </a:xfrm>
+      </p:grpSpPr>
+      <p:pic>
+        <p:nvPicPr>
+          <p:cNvPr id="4" name="Picture 3">
+            <a:extLst>
+              <a:ext uri="{FF2B5EF4-FFF2-40B4-BE49-F238E27FC236}">
+                <a16:creationId xmlns:a16="http://schemas.microsoft.com/office/drawing/2014/main" id="{CF077F02-FAEA-45FB-90A8-1445300D7370}"/>
+              </a:ext>
+            </a:extLst>
+          </p:cNvPr>
           <p:cNvPicPr>
             <a:picLocks noChangeAspect="1"/>
           </p:cNvPicPr>
           <p:nvPr/>
         </p:nvPicPr>
         <p:blipFill>
-          <a:blip r:embed="rId2"/>
+          <a:blip r:embed="rId3"/>
           <a:stretch>
             <a:fillRect/>
           </a:stretch>
         </p:blipFill>
         <p:spPr>
           <a:xfrm>
-            <a:off x="570460" y="1942782"/>
-            <a:ext cx="5509727" cy="2252699"/>
+            <a:off x="788631" y="1237593"/>
+            <a:ext cx="5129351" cy="3577499"/>
           </a:xfrm>
           <a:prstGeom prst="rect">
             <a:avLst/>
           </a:prstGeom>
         </p:spPr>
       </p:pic>
-      <p:sp>
-        <p:nvSpPr>
-          <p:cNvPr id="5" name="TextBox 4"/>
-          <p:cNvSpPr txBox="1"/>
+      <p:pic>
+        <p:nvPicPr>
+          <p:cNvPr id="7" name="Picture 6">
+            <a:extLst>
+              <a:ext uri="{FF2B5EF4-FFF2-40B4-BE49-F238E27FC236}">
+                <a16:creationId xmlns:a16="http://schemas.microsoft.com/office/drawing/2014/main" id="{B48B27E3-C171-4963-92F5-2AFAB60309BE}"/>
+              </a:ext>
+            </a:extLst>
+          </p:cNvPr>
+          <p:cNvPicPr>
+            <a:picLocks noChangeAspect="1"/>
+          </p:cNvPicPr>
           <p:nvPr/>
-        </p:nvSpPr>
+        </p:nvPicPr>
+        <p:blipFill>
+          <a:blip r:embed="rId4"/>
+          <a:stretch>
+            <a:fillRect/>
+          </a:stretch>
+        </p:blipFill>
         <p:spPr>
           <a:xfrm>
-            <a:off x="6539427" y="1524098"/>
-            <a:ext cx="5323868" cy="4062651"/>
+            <a:off x="4639487" y="4984220"/>
+            <a:ext cx="2821276" cy="1180875"/>
           </a:xfrm>
           <a:prstGeom prst="rect">
             <a:avLst/>
           </a:prstGeom>
-          <a:noFill/>
-        </p:spPr>
-        <p:txBody>
-          <a:bodyPr wrap="square" rtlCol="0">
-            <a:spAutoFit/>
-          </a:bodyPr>
-          <a:lstStyle/>
-          <a:p>
-            <a:r>
-              <a:rPr lang="en-US" sz="2000" dirty="0">
-                <a:latin typeface="Calibri" panose="020F0502020204030204" pitchFamily="34" charset="0"/>
-              </a:rPr>
-              <a:t>advantages:</a:t>
-            </a:r>
-          </a:p>
-          <a:p>
-            <a:endParaRPr lang="en-US" sz="2000" dirty="0">
-              <a:latin typeface="Calibri" panose="020F0502020204030204" pitchFamily="34" charset="0"/>
-            </a:endParaRPr>
-          </a:p>
-          <a:p>
-            <a:r>
-              <a:rPr lang="en-US" sz="2000" dirty="0">
-                <a:latin typeface="Calibri" panose="020F0502020204030204" pitchFamily="34" charset="0"/>
-              </a:rPr>
-              <a:t>ease of interpretation</a:t>
-            </a:r>
-          </a:p>
-          <a:p>
-            <a:r>
-              <a:rPr lang="en-US" sz="2000" dirty="0">
-                <a:latin typeface="Calibri" panose="020F0502020204030204" pitchFamily="34" charset="0"/>
-              </a:rPr>
-              <a:t>handles continuous and discrete features</a:t>
-            </a:r>
-          </a:p>
-          <a:p>
-            <a:r>
-              <a:rPr lang="en-US" sz="2000" dirty="0">
-                <a:latin typeface="Calibri" panose="020F0502020204030204" pitchFamily="34" charset="0"/>
-              </a:rPr>
-              <a:t>invariant to monotone transformation of features</a:t>
-            </a:r>
-          </a:p>
-          <a:p>
-            <a:r>
-              <a:rPr lang="en-US" sz="2000" dirty="0">
-                <a:latin typeface="Calibri" panose="020F0502020204030204" pitchFamily="34" charset="0"/>
-              </a:rPr>
-              <a:t>variable selection automated</a:t>
-            </a:r>
-          </a:p>
-          <a:p>
-            <a:r>
-              <a:rPr lang="nl-BE" sz="2000" b="1" dirty="0">
-                <a:latin typeface="Calibri" panose="020F0502020204030204" pitchFamily="34" charset="0"/>
-              </a:rPr>
-              <a:t>low bias </a:t>
-            </a:r>
-            <a:r>
-              <a:rPr lang="nl-BE" sz="2000" dirty="0">
-                <a:latin typeface="Calibri" panose="020F0502020204030204" pitchFamily="34" charset="0"/>
-              </a:rPr>
-              <a:t>(deep trees)</a:t>
-            </a:r>
-            <a:endParaRPr lang="en-US" sz="2000" dirty="0">
-              <a:latin typeface="Calibri" panose="020F0502020204030204" pitchFamily="34" charset="0"/>
-            </a:endParaRPr>
-          </a:p>
-          <a:p>
-            <a:endParaRPr lang="en-US" sz="2000" dirty="0">
-              <a:latin typeface="Calibri" panose="020F0502020204030204" pitchFamily="34" charset="0"/>
-            </a:endParaRPr>
-          </a:p>
-          <a:p>
-            <a:r>
-              <a:rPr lang="en-US" sz="2000" dirty="0">
-                <a:latin typeface="Calibri" panose="020F0502020204030204" pitchFamily="34" charset="0"/>
-              </a:rPr>
-              <a:t>disadvantages:</a:t>
-            </a:r>
-          </a:p>
-          <a:p>
-            <a:endParaRPr lang="en-US" sz="2000" dirty="0">
-              <a:latin typeface="Calibri" panose="020F0502020204030204" pitchFamily="34" charset="0"/>
-            </a:endParaRPr>
-          </a:p>
-          <a:p>
-            <a:r>
-              <a:rPr lang="en-US" sz="2000" b="1" dirty="0">
-                <a:latin typeface="Calibri" panose="020F0502020204030204" pitchFamily="34" charset="0"/>
-              </a:rPr>
-              <a:t>high variance</a:t>
-            </a:r>
-          </a:p>
-          <a:p>
-            <a:r>
-              <a:rPr lang="en-US" sz="2000" dirty="0" err="1">
-                <a:latin typeface="Calibri" panose="020F0502020204030204" pitchFamily="34" charset="0"/>
-              </a:rPr>
-              <a:t>overfitting</a:t>
-            </a:r>
-            <a:endParaRPr lang="en-US" sz="2000" dirty="0">
-              <a:latin typeface="Calibri" panose="020F0502020204030204" pitchFamily="34" charset="0"/>
-            </a:endParaRPr>
-          </a:p>
-          <a:p>
-            <a:pPr marL="285750" indent="-285750">
-              <a:buFont typeface="Courier New" panose="02070309020205020404" pitchFamily="49" charset="0"/>
-              <a:buChar char="o"/>
-            </a:pPr>
-            <a:endParaRPr lang="en-US" dirty="0">
-              <a:latin typeface="Calibri" panose="020F0502020204030204" pitchFamily="34" charset="0"/>
-            </a:endParaRPr>
-          </a:p>
-        </p:txBody>
-      </p:sp>
-      <p:sp>
-        <p:nvSpPr>
-          <p:cNvPr id="4" name="TextBox 3">
+        </p:spPr>
+      </p:pic>
+      <p:sp>
+        <p:nvSpPr>
+          <p:cNvPr id="11" name="TextBox 10">
             <a:extLst>
               <a:ext uri="{FF2B5EF4-FFF2-40B4-BE49-F238E27FC236}">
-                <a16:creationId xmlns:a16="http://schemas.microsoft.com/office/drawing/2014/main" id="{61CBF3B4-3D25-A8D2-9AFA-2BAA3D38C33F}"/>
+                <a16:creationId xmlns:a16="http://schemas.microsoft.com/office/drawing/2014/main" id="{08D1CD4C-9C37-4319-98C6-2129F249395B}"/>
               </a:ext>
             </a:extLst>
           </p:cNvPr>
@@ -6213,8 +7723,8 @@
         </p:nvSpPr>
         <p:spPr>
           <a:xfrm>
-            <a:off x="241301" y="129804"/>
-            <a:ext cx="11747500" cy="523220"/>
+            <a:off x="6511158" y="1206337"/>
+            <a:ext cx="5044966" cy="3693319"/>
           </a:xfrm>
           <a:prstGeom prst="rect">
             <a:avLst/>
@@ -6228,15 +7738,74 @@
           <a:lstStyle/>
           <a:p>
             <a:r>
+              <a:rPr lang="en-GB" dirty="0"/>
+              <a:t>The weight of a weak model in the boosted meta-model increases exponentially as the error approaches 0. Better models are given exponentially more weight.</a:t>
+            </a:r>
+          </a:p>
+          <a:p>
+            <a:endParaRPr lang="en-GB" dirty="0"/>
+          </a:p>
+          <a:p>
+            <a:r>
+              <a:rPr lang="en-GB" dirty="0"/>
+              <a:t>The weight is zero if the error rate is 0.5. A model with 50% accuracy is no better than random guessing, so it is ignored.</a:t>
+            </a:r>
+          </a:p>
+          <a:p>
+            <a:endParaRPr lang="en-GB" dirty="0"/>
+          </a:p>
+          <a:p>
+            <a:r>
+              <a:rPr lang="en-GB" dirty="0"/>
+              <a:t>The weight decreases exponentially as the error approaches 1. A negative weight is given to classifiers with worse than 50% accuracy. “Whatever that classifier says, do the opposite!”.</a:t>
+            </a:r>
+            <a:endParaRPr lang="nl-BE" dirty="0"/>
+          </a:p>
+        </p:txBody>
+      </p:sp>
+      <p:sp>
+        <p:nvSpPr>
+          <p:cNvPr id="3" name="TextBox 2">
+            <a:extLst>
+              <a:ext uri="{FF2B5EF4-FFF2-40B4-BE49-F238E27FC236}">
+                <a16:creationId xmlns:a16="http://schemas.microsoft.com/office/drawing/2014/main" id="{A23DCAF8-9428-757C-E6AE-5BB47A45C10E}"/>
+              </a:ext>
+            </a:extLst>
+          </p:cNvPr>
+          <p:cNvSpPr txBox="1"/>
+          <p:nvPr/>
+        </p:nvSpPr>
+        <p:spPr>
+          <a:xfrm>
+            <a:off x="241301" y="129804"/>
+            <a:ext cx="11747500" cy="523220"/>
+          </a:xfrm>
+          <a:prstGeom prst="rect">
+            <a:avLst/>
+          </a:prstGeom>
+          <a:noFill/>
+        </p:spPr>
+        <p:txBody>
+          <a:bodyPr wrap="square" rtlCol="0">
+            <a:spAutoFit/>
+          </a:bodyPr>
+          <a:lstStyle/>
+          <a:p>
+            <a:r>
               <a:rPr lang="en-US" sz="2800" dirty="0">
-                <a:latin typeface="+mj-lt"/>
                 <a:ea typeface="Lato" panose="020B0604020202020204" pitchFamily="34" charset="0"/>
                 <a:cs typeface="Helvetica" panose="020B0604020202020204" pitchFamily="34" charset="0"/>
               </a:rPr>
-              <a:t>decision tree models</a:t>
+              <a:t>Boosting: </a:t>
+            </a:r>
+            <a:r>
+              <a:rPr lang="en-US" sz="2800" dirty="0" err="1">
+                <a:ea typeface="Lato" panose="020B0604020202020204" pitchFamily="34" charset="0"/>
+                <a:cs typeface="Helvetica" panose="020B0604020202020204" pitchFamily="34" charset="0"/>
+              </a:rPr>
+              <a:t>Adaboost</a:t>
             </a:r>
             <a:endParaRPr lang="en-GB" sz="2800" dirty="0">
-              <a:latin typeface="+mj-lt"/>
               <a:ea typeface="Lato" panose="020B0604020202020204" pitchFamily="34" charset="0"/>
               <a:cs typeface="Helvetica" panose="020B0604020202020204" pitchFamily="34" charset="0"/>
             </a:endParaRPr>
@@ -6246,7 +7815,116 @@
     </p:spTree>
     <p:extLst>
       <p:ext uri="{BB962C8B-B14F-4D97-AF65-F5344CB8AC3E}">
-        <p14:creationId xmlns:p14="http://schemas.microsoft.com/office/powerpoint/2010/main" val="3933282328"/>
+        <p14:creationId xmlns:p14="http://schemas.microsoft.com/office/powerpoint/2010/main" val="1745475178"/>
+      </p:ext>
+    </p:extLst>
+  </p:cSld>
+  <p:clrMapOvr>
+    <a:masterClrMapping/>
+  </p:clrMapOvr>
+</p:sld>
+</file>
+
+<file path=ppt/slides/slide22.xml><?xml version="1.0" encoding="utf-8"?>
+<p:sld xmlns:a="http://schemas.openxmlformats.org/drawingml/2006/main" xmlns:r="http://schemas.openxmlformats.org/officeDocument/2006/relationships" xmlns:p="http://schemas.openxmlformats.org/presentationml/2006/main" show="0">
+  <p:cSld>
+    <p:spTree>
+      <p:nvGrpSpPr>
+        <p:cNvPr id="1" name=""/>
+        <p:cNvGrpSpPr/>
+        <p:nvPr/>
+      </p:nvGrpSpPr>
+      <p:grpSpPr>
+        <a:xfrm>
+          <a:off x="0" y="0"/>
+          <a:ext cx="0" cy="0"/>
+          <a:chOff x="0" y="0"/>
+          <a:chExt cx="0" cy="0"/>
+        </a:xfrm>
+      </p:grpSpPr>
+      <p:pic>
+        <p:nvPicPr>
+          <p:cNvPr id="3" name="Picture 2">
+            <a:extLst>
+              <a:ext uri="{FF2B5EF4-FFF2-40B4-BE49-F238E27FC236}">
+                <a16:creationId xmlns:a16="http://schemas.microsoft.com/office/drawing/2014/main" id="{E2D10274-E285-4C03-8EC7-C9C0E671A447}"/>
+              </a:ext>
+            </a:extLst>
+          </p:cNvPr>
+          <p:cNvPicPr>
+            <a:picLocks noChangeAspect="1"/>
+          </p:cNvPicPr>
+          <p:nvPr/>
+        </p:nvPicPr>
+        <p:blipFill>
+          <a:blip r:embed="rId3"/>
+          <a:stretch>
+            <a:fillRect/>
+          </a:stretch>
+        </p:blipFill>
+        <p:spPr>
+          <a:xfrm>
+            <a:off x="7910" y="1563896"/>
+            <a:ext cx="11980891" cy="4295037"/>
+          </a:xfrm>
+          <a:prstGeom prst="rect">
+            <a:avLst/>
+          </a:prstGeom>
+        </p:spPr>
+      </p:pic>
+      <p:sp>
+        <p:nvSpPr>
+          <p:cNvPr id="4" name="TextBox 3">
+            <a:extLst>
+              <a:ext uri="{FF2B5EF4-FFF2-40B4-BE49-F238E27FC236}">
+                <a16:creationId xmlns:a16="http://schemas.microsoft.com/office/drawing/2014/main" id="{D88A1296-B9F1-0010-1E0F-26636DB13A86}"/>
+              </a:ext>
+            </a:extLst>
+          </p:cNvPr>
+          <p:cNvSpPr txBox="1"/>
+          <p:nvPr/>
+        </p:nvSpPr>
+        <p:spPr>
+          <a:xfrm>
+            <a:off x="241301" y="129804"/>
+            <a:ext cx="11747500" cy="523220"/>
+          </a:xfrm>
+          <a:prstGeom prst="rect">
+            <a:avLst/>
+          </a:prstGeom>
+          <a:noFill/>
+        </p:spPr>
+        <p:txBody>
+          <a:bodyPr wrap="square" rtlCol="0">
+            <a:spAutoFit/>
+          </a:bodyPr>
+          <a:lstStyle/>
+          <a:p>
+            <a:r>
+              <a:rPr lang="en-US" sz="2800" dirty="0">
+                <a:ea typeface="Lato" panose="020B0604020202020204" pitchFamily="34" charset="0"/>
+                <a:cs typeface="Helvetica" panose="020B0604020202020204" pitchFamily="34" charset="0"/>
+              </a:rPr>
+              <a:t>Boosting: </a:t>
+            </a:r>
+            <a:r>
+              <a:rPr lang="en-US" sz="2800" dirty="0" err="1">
+                <a:ea typeface="Lato" panose="020B0604020202020204" pitchFamily="34" charset="0"/>
+                <a:cs typeface="Helvetica" panose="020B0604020202020204" pitchFamily="34" charset="0"/>
+              </a:rPr>
+              <a:t>Adaboost</a:t>
+            </a:r>
+            <a:endParaRPr lang="en-GB" sz="2800" dirty="0">
+              <a:ea typeface="Lato" panose="020B0604020202020204" pitchFamily="34" charset="0"/>
+              <a:cs typeface="Helvetica" panose="020B0604020202020204" pitchFamily="34" charset="0"/>
+            </a:endParaRPr>
+          </a:p>
+        </p:txBody>
+      </p:sp>
+    </p:spTree>
+    <p:extLst>
+      <p:ext uri="{BB962C8B-B14F-4D97-AF65-F5344CB8AC3E}">
+        <p14:creationId xmlns:p14="http://schemas.microsoft.com/office/powerpoint/2010/main" val="1820715527"/>
       </p:ext>
     </p:extLst>
   </p:cSld>
@@ -6257,6 +7935,256 @@
 </file>
 
 <file path=ppt/slides/slide3.xml><?xml version="1.0" encoding="utf-8"?>
+<p:sld xmlns:a="http://schemas.openxmlformats.org/drawingml/2006/main" xmlns:r="http://schemas.openxmlformats.org/officeDocument/2006/relationships" xmlns:p="http://schemas.openxmlformats.org/presentationml/2006/main">
+  <p:cSld>
+    <p:spTree>
+      <p:nvGrpSpPr>
+        <p:cNvPr id="1" name=""/>
+        <p:cNvGrpSpPr/>
+        <p:nvPr/>
+      </p:nvGrpSpPr>
+      <p:grpSpPr>
+        <a:xfrm>
+          <a:off x="0" y="0"/>
+          <a:ext cx="0" cy="0"/>
+          <a:chOff x="0" y="0"/>
+          <a:chExt cx="0" cy="0"/>
+        </a:xfrm>
+      </p:grpSpPr>
+      <p:sp>
+        <p:nvSpPr>
+          <p:cNvPr id="5" name="TextBox 4"/>
+          <p:cNvSpPr txBox="1"/>
+          <p:nvPr/>
+        </p:nvSpPr>
+        <p:spPr>
+          <a:xfrm>
+            <a:off x="6539427" y="1524098"/>
+            <a:ext cx="5323868" cy="4062651"/>
+          </a:xfrm>
+          <a:prstGeom prst="rect">
+            <a:avLst/>
+          </a:prstGeom>
+          <a:noFill/>
+        </p:spPr>
+        <p:txBody>
+          <a:bodyPr wrap="square" rtlCol="0">
+            <a:spAutoFit/>
+          </a:bodyPr>
+          <a:lstStyle/>
+          <a:p>
+            <a:r>
+              <a:rPr lang="en-US" sz="2000" dirty="0">
+                <a:latin typeface="Calibri" panose="020F0502020204030204" pitchFamily="34" charset="0"/>
+              </a:rPr>
+              <a:t>advantages:</a:t>
+            </a:r>
+          </a:p>
+          <a:p>
+            <a:endParaRPr lang="en-US" sz="2000" dirty="0">
+              <a:latin typeface="Calibri" panose="020F0502020204030204" pitchFamily="34" charset="0"/>
+            </a:endParaRPr>
+          </a:p>
+          <a:p>
+            <a:r>
+              <a:rPr lang="en-US" sz="2000" dirty="0">
+                <a:latin typeface="Calibri" panose="020F0502020204030204" pitchFamily="34" charset="0"/>
+              </a:rPr>
+              <a:t>ease of interpretation</a:t>
+            </a:r>
+          </a:p>
+          <a:p>
+            <a:r>
+              <a:rPr lang="en-US" sz="2000" dirty="0">
+                <a:latin typeface="Calibri" panose="020F0502020204030204" pitchFamily="34" charset="0"/>
+              </a:rPr>
+              <a:t>handles continuous and discrete features</a:t>
+            </a:r>
+          </a:p>
+          <a:p>
+            <a:r>
+              <a:rPr lang="en-US" sz="2000" dirty="0">
+                <a:latin typeface="Calibri" panose="020F0502020204030204" pitchFamily="34" charset="0"/>
+              </a:rPr>
+              <a:t>invariant to monotone transformation of features</a:t>
+            </a:r>
+          </a:p>
+          <a:p>
+            <a:r>
+              <a:rPr lang="en-US" sz="2000" dirty="0">
+                <a:latin typeface="Calibri" panose="020F0502020204030204" pitchFamily="34" charset="0"/>
+              </a:rPr>
+              <a:t>variable selection automated</a:t>
+            </a:r>
+          </a:p>
+          <a:p>
+            <a:r>
+              <a:rPr lang="nl-BE" sz="2000" b="1" dirty="0">
+                <a:latin typeface="Calibri" panose="020F0502020204030204" pitchFamily="34" charset="0"/>
+              </a:rPr>
+              <a:t>low bias </a:t>
+            </a:r>
+            <a:r>
+              <a:rPr lang="nl-BE" sz="2000" dirty="0">
+                <a:latin typeface="Calibri" panose="020F0502020204030204" pitchFamily="34" charset="0"/>
+              </a:rPr>
+              <a:t>(deep trees)</a:t>
+            </a:r>
+            <a:endParaRPr lang="en-US" sz="2000" dirty="0">
+              <a:latin typeface="Calibri" panose="020F0502020204030204" pitchFamily="34" charset="0"/>
+            </a:endParaRPr>
+          </a:p>
+          <a:p>
+            <a:endParaRPr lang="en-US" sz="2000" dirty="0">
+              <a:latin typeface="Calibri" panose="020F0502020204030204" pitchFamily="34" charset="0"/>
+            </a:endParaRPr>
+          </a:p>
+          <a:p>
+            <a:r>
+              <a:rPr lang="en-US" sz="2000" dirty="0">
+                <a:latin typeface="Calibri" panose="020F0502020204030204" pitchFamily="34" charset="0"/>
+              </a:rPr>
+              <a:t>disadvantages:</a:t>
+            </a:r>
+          </a:p>
+          <a:p>
+            <a:endParaRPr lang="en-US" sz="2000" dirty="0">
+              <a:latin typeface="Calibri" panose="020F0502020204030204" pitchFamily="34" charset="0"/>
+            </a:endParaRPr>
+          </a:p>
+          <a:p>
+            <a:r>
+              <a:rPr lang="en-US" sz="2000" b="1" dirty="0">
+                <a:latin typeface="Calibri" panose="020F0502020204030204" pitchFamily="34" charset="0"/>
+              </a:rPr>
+              <a:t>high variance</a:t>
+            </a:r>
+          </a:p>
+          <a:p>
+            <a:r>
+              <a:rPr lang="en-US" sz="2000" dirty="0" err="1">
+                <a:latin typeface="Calibri" panose="020F0502020204030204" pitchFamily="34" charset="0"/>
+              </a:rPr>
+              <a:t>overfitting</a:t>
+            </a:r>
+            <a:endParaRPr lang="en-US" sz="2000" dirty="0">
+              <a:latin typeface="Calibri" panose="020F0502020204030204" pitchFamily="34" charset="0"/>
+            </a:endParaRPr>
+          </a:p>
+          <a:p>
+            <a:pPr marL="285750" indent="-285750">
+              <a:buFont typeface="Courier New" panose="02070309020205020404" pitchFamily="49" charset="0"/>
+              <a:buChar char="o"/>
+            </a:pPr>
+            <a:endParaRPr lang="en-US" dirty="0">
+              <a:latin typeface="Calibri" panose="020F0502020204030204" pitchFamily="34" charset="0"/>
+            </a:endParaRPr>
+          </a:p>
+        </p:txBody>
+      </p:sp>
+      <p:sp>
+        <p:nvSpPr>
+          <p:cNvPr id="4" name="TextBox 3">
+            <a:extLst>
+              <a:ext uri="{FF2B5EF4-FFF2-40B4-BE49-F238E27FC236}">
+                <a16:creationId xmlns:a16="http://schemas.microsoft.com/office/drawing/2014/main" id="{61CBF3B4-3D25-A8D2-9AFA-2BAA3D38C33F}"/>
+              </a:ext>
+            </a:extLst>
+          </p:cNvPr>
+          <p:cNvSpPr txBox="1"/>
+          <p:nvPr/>
+        </p:nvSpPr>
+        <p:spPr>
+          <a:xfrm>
+            <a:off x="241301" y="129804"/>
+            <a:ext cx="11747500" cy="523220"/>
+          </a:xfrm>
+          <a:prstGeom prst="rect">
+            <a:avLst/>
+          </a:prstGeom>
+          <a:noFill/>
+        </p:spPr>
+        <p:txBody>
+          <a:bodyPr wrap="square" rtlCol="0">
+            <a:spAutoFit/>
+          </a:bodyPr>
+          <a:lstStyle/>
+          <a:p>
+            <a:r>
+              <a:rPr lang="en-US" sz="2800" dirty="0">
+                <a:ea typeface="Lato" panose="020B0604020202020204" pitchFamily="34" charset="0"/>
+                <a:cs typeface="Helvetica" panose="020B0604020202020204" pitchFamily="34" charset="0"/>
+              </a:rPr>
+              <a:t>Decision tree</a:t>
+            </a:r>
+            <a:endParaRPr lang="en-GB" sz="2800" dirty="0">
+              <a:ea typeface="Lato" panose="020B0604020202020204" pitchFamily="34" charset="0"/>
+              <a:cs typeface="Helvetica" panose="020B0604020202020204" pitchFamily="34" charset="0"/>
+            </a:endParaRPr>
+          </a:p>
+        </p:txBody>
+      </p:sp>
+      <p:pic>
+        <p:nvPicPr>
+          <p:cNvPr id="3074" name="Picture 2" descr="1: Visualisation for a decision tree, trained on the Iris dataset... |  Download Scientific Diagram">
+            <a:extLst>
+              <a:ext uri="{FF2B5EF4-FFF2-40B4-BE49-F238E27FC236}">
+                <a16:creationId xmlns:a16="http://schemas.microsoft.com/office/drawing/2014/main" id="{45C103CF-E0FE-A6E4-2F48-7FFFA452B5FE}"/>
+              </a:ext>
+            </a:extLst>
+          </p:cNvPr>
+          <p:cNvPicPr>
+            <a:picLocks noChangeAspect="1" noChangeArrowheads="1"/>
+          </p:cNvPicPr>
+          <p:nvPr/>
+        </p:nvPicPr>
+        <p:blipFill>
+          <a:blip r:embed="rId2">
+            <a:extLst>
+              <a:ext uri="{28A0092B-C50C-407E-A947-70E740481C1C}">
+                <a14:useLocalDpi xmlns:a14="http://schemas.microsoft.com/office/drawing/2010/main" val="0"/>
+              </a:ext>
+            </a:extLst>
+          </a:blip>
+          <a:srcRect/>
+          <a:stretch>
+            <a:fillRect/>
+          </a:stretch>
+        </p:blipFill>
+        <p:spPr bwMode="auto">
+          <a:xfrm>
+            <a:off x="450180" y="1239320"/>
+            <a:ext cx="5807015" cy="4262596"/>
+          </a:xfrm>
+          <a:prstGeom prst="rect">
+            <a:avLst/>
+          </a:prstGeom>
+          <a:noFill/>
+          <a:extLst>
+            <a:ext uri="{909E8E84-426E-40DD-AFC4-6F175D3DCCD1}">
+              <a14:hiddenFill xmlns:a14="http://schemas.microsoft.com/office/drawing/2010/main">
+                <a:solidFill>
+                  <a:srgbClr val="FFFFFF"/>
+                </a:solidFill>
+              </a14:hiddenFill>
+            </a:ext>
+          </a:extLst>
+        </p:spPr>
+      </p:pic>
+    </p:spTree>
+    <p:extLst>
+      <p:ext uri="{BB962C8B-B14F-4D97-AF65-F5344CB8AC3E}">
+        <p14:creationId xmlns:p14="http://schemas.microsoft.com/office/powerpoint/2010/main" val="3679395829"/>
+      </p:ext>
+    </p:extLst>
+  </p:cSld>
+  <p:clrMapOvr>
+    <a:masterClrMapping/>
+  </p:clrMapOvr>
+</p:sld>
+</file>
+
+<file path=ppt/slides/slide4.xml><?xml version="1.0" encoding="utf-8"?>
 <p:sld xmlns:a="http://schemas.openxmlformats.org/drawingml/2006/main" xmlns:r="http://schemas.openxmlformats.org/officeDocument/2006/relationships" xmlns:p="http://schemas.openxmlformats.org/presentationml/2006/main">
   <p:cSld>
     <p:spTree>
@@ -6366,7 +8294,7 @@
 </p:sld>
 </file>
 
-<file path=ppt/slides/slide4.xml><?xml version="1.0" encoding="utf-8"?>
+<file path=ppt/slides/slide5.xml><?xml version="1.0" encoding="utf-8"?>
 <p:sld xmlns:a="http://schemas.openxmlformats.org/drawingml/2006/main" xmlns:r="http://schemas.openxmlformats.org/officeDocument/2006/relationships" xmlns:p="http://schemas.openxmlformats.org/presentationml/2006/main">
   <p:cSld>
     <p:spTree>
@@ -6494,7 +8422,264 @@
 </p:sld>
 </file>
 
-<file path=ppt/slides/slide5.xml><?xml version="1.0" encoding="utf-8"?>
+<file path=ppt/slides/slide6.xml><?xml version="1.0" encoding="utf-8"?>
+<p:sld xmlns:a="http://schemas.openxmlformats.org/drawingml/2006/main" xmlns:r="http://schemas.openxmlformats.org/officeDocument/2006/relationships" xmlns:p="http://schemas.openxmlformats.org/presentationml/2006/main">
+  <p:cSld>
+    <p:spTree>
+      <p:nvGrpSpPr>
+        <p:cNvPr id="1" name="">
+          <a:extLst>
+            <a:ext uri="{FF2B5EF4-FFF2-40B4-BE49-F238E27FC236}">
+              <a16:creationId xmlns:a16="http://schemas.microsoft.com/office/drawing/2014/main" id="{72F39212-834D-E113-E31B-426385CFB01F}"/>
+            </a:ext>
+          </a:extLst>
+        </p:cNvPr>
+        <p:cNvGrpSpPr/>
+        <p:nvPr/>
+      </p:nvGrpSpPr>
+      <p:grpSpPr>
+        <a:xfrm>
+          <a:off x="0" y="0"/>
+          <a:ext cx="0" cy="0"/>
+          <a:chOff x="0" y="0"/>
+          <a:chExt cx="0" cy="0"/>
+        </a:xfrm>
+      </p:grpSpPr>
+      <p:sp>
+        <p:nvSpPr>
+          <p:cNvPr id="4" name="TextBox 3">
+            <a:extLst>
+              <a:ext uri="{FF2B5EF4-FFF2-40B4-BE49-F238E27FC236}">
+                <a16:creationId xmlns:a16="http://schemas.microsoft.com/office/drawing/2014/main" id="{E1417B48-0775-F429-4CD0-ED16DA297E73}"/>
+              </a:ext>
+            </a:extLst>
+          </p:cNvPr>
+          <p:cNvSpPr txBox="1"/>
+          <p:nvPr/>
+        </p:nvSpPr>
+        <p:spPr>
+          <a:xfrm>
+            <a:off x="241301" y="129804"/>
+            <a:ext cx="11747500" cy="523220"/>
+          </a:xfrm>
+          <a:prstGeom prst="rect">
+            <a:avLst/>
+          </a:prstGeom>
+          <a:noFill/>
+        </p:spPr>
+        <p:txBody>
+          <a:bodyPr wrap="square" rtlCol="0">
+            <a:spAutoFit/>
+          </a:bodyPr>
+          <a:lstStyle/>
+          <a:p>
+            <a:r>
+              <a:rPr lang="en-US" sz="2800" i="1" dirty="0">
+                <a:latin typeface="+mj-lt"/>
+                <a:ea typeface="Lato" panose="020B0604020202020204" pitchFamily="34" charset="0"/>
+                <a:cs typeface="Helvetica" panose="020B0604020202020204" pitchFamily="34" charset="0"/>
+              </a:rPr>
+              <a:t>5</a:t>
+            </a:r>
+            <a:r>
+              <a:rPr lang="en-US" sz="2800" dirty="0">
+                <a:latin typeface="+mj-lt"/>
+                <a:ea typeface="Lato" panose="020B0604020202020204" pitchFamily="34" charset="0"/>
+                <a:cs typeface="Helvetica" panose="020B0604020202020204" pitchFamily="34" charset="0"/>
+              </a:rPr>
+              <a:t>-fold cross-validation</a:t>
+            </a:r>
+            <a:endParaRPr lang="en-GB" sz="2800" dirty="0">
+              <a:latin typeface="+mj-lt"/>
+              <a:ea typeface="Lato" panose="020B0604020202020204" pitchFamily="34" charset="0"/>
+              <a:cs typeface="Helvetica" panose="020B0604020202020204" pitchFamily="34" charset="0"/>
+            </a:endParaRPr>
+          </a:p>
+        </p:txBody>
+      </p:sp>
+      <p:pic>
+        <p:nvPicPr>
+          <p:cNvPr id="6" name="Picture 5" descr="A screenshot of a computer&#10;&#10;Description automatically generated with medium confidence">
+            <a:extLst>
+              <a:ext uri="{FF2B5EF4-FFF2-40B4-BE49-F238E27FC236}">
+                <a16:creationId xmlns:a16="http://schemas.microsoft.com/office/drawing/2014/main" id="{E835276C-B480-20F7-1B45-9955A9F2B239}"/>
+              </a:ext>
+            </a:extLst>
+          </p:cNvPr>
+          <p:cNvPicPr>
+            <a:picLocks noChangeAspect="1"/>
+          </p:cNvPicPr>
+          <p:nvPr/>
+        </p:nvPicPr>
+        <p:blipFill>
+          <a:blip r:embed="rId2">
+            <a:extLst>
+              <a:ext uri="{28A0092B-C50C-407E-A947-70E740481C1C}">
+                <a14:useLocalDpi xmlns:a14="http://schemas.microsoft.com/office/drawing/2010/main" val="0"/>
+              </a:ext>
+            </a:extLst>
+          </a:blip>
+          <a:srcRect b="76562"/>
+          <a:stretch>
+            <a:fillRect/>
+          </a:stretch>
+        </p:blipFill>
+        <p:spPr>
+          <a:xfrm>
+            <a:off x="1809065" y="922952"/>
+            <a:ext cx="7633396" cy="1239223"/>
+          </a:xfrm>
+          <a:prstGeom prst="rect">
+            <a:avLst/>
+          </a:prstGeom>
+        </p:spPr>
+      </p:pic>
+      <p:sp>
+        <p:nvSpPr>
+          <p:cNvPr id="2" name="Rectangle 1">
+            <a:extLst>
+              <a:ext uri="{FF2B5EF4-FFF2-40B4-BE49-F238E27FC236}">
+                <a16:creationId xmlns:a16="http://schemas.microsoft.com/office/drawing/2014/main" id="{FDFD6532-F626-F555-6003-0D243397DC53}"/>
+              </a:ext>
+            </a:extLst>
+          </p:cNvPr>
+          <p:cNvSpPr/>
+          <p:nvPr/>
+        </p:nvSpPr>
+        <p:spPr>
+          <a:xfrm>
+            <a:off x="6276975" y="1533525"/>
+            <a:ext cx="895350" cy="409575"/>
+          </a:xfrm>
+          <a:prstGeom prst="rect">
+            <a:avLst/>
+          </a:prstGeom>
+          <a:solidFill>
+            <a:srgbClr val="FF0000"/>
+          </a:solidFill>
+          <a:ln>
+            <a:solidFill>
+              <a:srgbClr val="FF0000"/>
+            </a:solidFill>
+          </a:ln>
+        </p:spPr>
+        <p:style>
+          <a:lnRef idx="2">
+            <a:schemeClr val="accent1">
+              <a:shade val="15000"/>
+            </a:schemeClr>
+          </a:lnRef>
+          <a:fillRef idx="1">
+            <a:schemeClr val="accent1"/>
+          </a:fillRef>
+          <a:effectRef idx="0">
+            <a:schemeClr val="accent1"/>
+          </a:effectRef>
+          <a:fontRef idx="minor">
+            <a:schemeClr val="lt1"/>
+          </a:fontRef>
+        </p:style>
+        <p:txBody>
+          <a:bodyPr rtlCol="0" anchor="ctr"/>
+          <a:lstStyle/>
+          <a:p>
+            <a:pPr algn="ctr"/>
+            <a:endParaRPr lang="en-NL"/>
+          </a:p>
+        </p:txBody>
+      </p:sp>
+      <p:sp>
+        <p:nvSpPr>
+          <p:cNvPr id="3" name="TextBox 2">
+            <a:extLst>
+              <a:ext uri="{FF2B5EF4-FFF2-40B4-BE49-F238E27FC236}">
+                <a16:creationId xmlns:a16="http://schemas.microsoft.com/office/drawing/2014/main" id="{733E7AF2-6C7E-CF01-12F1-7F840A758478}"/>
+              </a:ext>
+            </a:extLst>
+          </p:cNvPr>
+          <p:cNvSpPr txBox="1"/>
+          <p:nvPr/>
+        </p:nvSpPr>
+        <p:spPr>
+          <a:xfrm>
+            <a:off x="5625763" y="2264807"/>
+            <a:ext cx="2200275" cy="369332"/>
+          </a:xfrm>
+          <a:prstGeom prst="rect">
+            <a:avLst/>
+          </a:prstGeom>
+          <a:noFill/>
+        </p:spPr>
+        <p:txBody>
+          <a:bodyPr wrap="square" rtlCol="0">
+            <a:spAutoFit/>
+          </a:bodyPr>
+          <a:lstStyle/>
+          <a:p>
+            <a:pPr algn="ctr"/>
+            <a:r>
+              <a:rPr lang="en-US" dirty="0"/>
+              <a:t>Validation data</a:t>
+            </a:r>
+            <a:endParaRPr lang="en-NL" dirty="0"/>
+          </a:p>
+        </p:txBody>
+      </p:sp>
+      <p:cxnSp>
+        <p:nvCxnSpPr>
+          <p:cNvPr id="7" name="Straight Arrow Connector 6">
+            <a:extLst>
+              <a:ext uri="{FF2B5EF4-FFF2-40B4-BE49-F238E27FC236}">
+                <a16:creationId xmlns:a16="http://schemas.microsoft.com/office/drawing/2014/main" id="{2BA99BA1-86C3-FADD-41C0-29C02CDD9027}"/>
+              </a:ext>
+            </a:extLst>
+          </p:cNvPr>
+          <p:cNvCxnSpPr>
+            <a:stCxn id="3" idx="0"/>
+          </p:cNvCxnSpPr>
+          <p:nvPr/>
+        </p:nvCxnSpPr>
+        <p:spPr>
+          <a:xfrm flipH="1" flipV="1">
+            <a:off x="6724650" y="1943100"/>
+            <a:ext cx="1251" cy="321707"/>
+          </a:xfrm>
+          <a:prstGeom prst="straightConnector1">
+            <a:avLst/>
+          </a:prstGeom>
+          <a:ln>
+            <a:tailEnd type="triangle"/>
+          </a:ln>
+        </p:spPr>
+        <p:style>
+          <a:lnRef idx="1">
+            <a:schemeClr val="dk1"/>
+          </a:lnRef>
+          <a:fillRef idx="0">
+            <a:schemeClr val="dk1"/>
+          </a:fillRef>
+          <a:effectRef idx="0">
+            <a:schemeClr val="dk1"/>
+          </a:effectRef>
+          <a:fontRef idx="minor">
+            <a:schemeClr val="tx1"/>
+          </a:fontRef>
+        </p:style>
+      </p:cxnSp>
+    </p:spTree>
+    <p:extLst>
+      <p:ext uri="{BB962C8B-B14F-4D97-AF65-F5344CB8AC3E}">
+        <p14:creationId xmlns:p14="http://schemas.microsoft.com/office/powerpoint/2010/main" val="3531563971"/>
+      </p:ext>
+    </p:extLst>
+  </p:cSld>
+  <p:clrMapOvr>
+    <a:masterClrMapping/>
+  </p:clrMapOvr>
+</p:sld>
+</file>
+
+<file path=ppt/slides/slide7.xml><?xml version="1.0" encoding="utf-8"?>
 <p:sld xmlns:a="http://schemas.openxmlformats.org/drawingml/2006/main" xmlns:r="http://schemas.openxmlformats.org/officeDocument/2006/relationships" xmlns:p="http://schemas.openxmlformats.org/presentationml/2006/main">
   <p:cSld>
     <p:spTree>
@@ -6612,7 +8797,7 @@
 </p:sld>
 </file>
 
-<file path=ppt/slides/slide6.xml><?xml version="1.0" encoding="utf-8"?>
+<file path=ppt/slides/slide8.xml><?xml version="1.0" encoding="utf-8"?>
 <p:sld xmlns:a="http://schemas.openxmlformats.org/drawingml/2006/main" xmlns:r="http://schemas.openxmlformats.org/officeDocument/2006/relationships" xmlns:p="http://schemas.openxmlformats.org/presentationml/2006/main">
   <p:cSld>
     <p:spTree>
@@ -6879,7 +9064,7 @@
 </p:sld>
 </file>
 
-<file path=ppt/slides/slide7.xml><?xml version="1.0" encoding="utf-8"?>
+<file path=ppt/slides/slide9.xml><?xml version="1.0" encoding="utf-8"?>
 <p:sld xmlns:a="http://schemas.openxmlformats.org/drawingml/2006/main" xmlns:r="http://schemas.openxmlformats.org/officeDocument/2006/relationships" xmlns:p="http://schemas.openxmlformats.org/presentationml/2006/main">
   <p:cSld>
     <p:spTree>
@@ -7104,480 +9289,6 @@
     <p:extLst>
       <p:ext uri="{BB962C8B-B14F-4D97-AF65-F5344CB8AC3E}">
         <p14:creationId xmlns:p14="http://schemas.microsoft.com/office/powerpoint/2010/main" val="4034051223"/>
-      </p:ext>
-    </p:extLst>
-  </p:cSld>
-  <p:clrMapOvr>
-    <a:masterClrMapping/>
-  </p:clrMapOvr>
-</p:sld>
-</file>
-
-<file path=ppt/slides/slide8.xml><?xml version="1.0" encoding="utf-8"?>
-<p:sld xmlns:a="http://schemas.openxmlformats.org/drawingml/2006/main" xmlns:r="http://schemas.openxmlformats.org/officeDocument/2006/relationships" xmlns:p="http://schemas.openxmlformats.org/presentationml/2006/main">
-  <p:cSld>
-    <p:spTree>
-      <p:nvGrpSpPr>
-        <p:cNvPr id="1" name=""/>
-        <p:cNvGrpSpPr/>
-        <p:nvPr/>
-      </p:nvGrpSpPr>
-      <p:grpSpPr>
-        <a:xfrm>
-          <a:off x="0" y="0"/>
-          <a:ext cx="0" cy="0"/>
-          <a:chOff x="0" y="0"/>
-          <a:chExt cx="0" cy="0"/>
-        </a:xfrm>
-      </p:grpSpPr>
-      <p:pic>
-        <p:nvPicPr>
-          <p:cNvPr id="6" name="Picture 5">
-            <a:extLst>
-              <a:ext uri="{FF2B5EF4-FFF2-40B4-BE49-F238E27FC236}">
-                <a16:creationId xmlns:a16="http://schemas.microsoft.com/office/drawing/2014/main" id="{1B256A8B-B416-4CA9-8771-48392FEF3D88}"/>
-              </a:ext>
-            </a:extLst>
-          </p:cNvPr>
-          <p:cNvPicPr>
-            <a:picLocks noChangeAspect="1"/>
-          </p:cNvPicPr>
-          <p:nvPr/>
-        </p:nvPicPr>
-        <p:blipFill>
-          <a:blip r:embed="rId3"/>
-          <a:stretch>
-            <a:fillRect/>
-          </a:stretch>
-        </p:blipFill>
-        <p:spPr>
-          <a:xfrm>
-            <a:off x="4439837" y="1642214"/>
-            <a:ext cx="6635437" cy="4167378"/>
-          </a:xfrm>
-          <a:prstGeom prst="rect">
-            <a:avLst/>
-          </a:prstGeom>
-        </p:spPr>
-      </p:pic>
-      <p:sp>
-        <p:nvSpPr>
-          <p:cNvPr id="2" name="TextBox 1">
-            <a:extLst>
-              <a:ext uri="{FF2B5EF4-FFF2-40B4-BE49-F238E27FC236}">
-                <a16:creationId xmlns:a16="http://schemas.microsoft.com/office/drawing/2014/main" id="{8A987E28-1D05-52C4-D0F5-0A1B810B0689}"/>
-              </a:ext>
-            </a:extLst>
-          </p:cNvPr>
-          <p:cNvSpPr txBox="1"/>
-          <p:nvPr/>
-        </p:nvSpPr>
-        <p:spPr>
-          <a:xfrm>
-            <a:off x="729720" y="2485910"/>
-            <a:ext cx="4055000" cy="2215991"/>
-          </a:xfrm>
-          <a:prstGeom prst="rect">
-            <a:avLst/>
-          </a:prstGeom>
-          <a:noFill/>
-        </p:spPr>
-        <p:txBody>
-          <a:bodyPr wrap="square" rtlCol="0">
-            <a:spAutoFit/>
-          </a:bodyPr>
-          <a:lstStyle/>
-          <a:p>
-            <a:r>
-              <a:rPr lang="nl-BE" sz="2400" dirty="0">
-                <a:latin typeface="Calibri" panose="020F0502020204030204" pitchFamily="34" charset="0"/>
-              </a:rPr>
-              <a:t>Error due to bias</a:t>
-            </a:r>
-          </a:p>
-          <a:p>
-            <a:endParaRPr lang="nl-BE" sz="2400" dirty="0">
-              <a:latin typeface="Calibri" panose="020F0502020204030204" pitchFamily="34" charset="0"/>
-            </a:endParaRPr>
-          </a:p>
-          <a:p>
-            <a:r>
-              <a:rPr lang="nl-BE" sz="2400" dirty="0">
-                <a:latin typeface="Calibri" panose="020F0502020204030204" pitchFamily="34" charset="0"/>
-              </a:rPr>
-              <a:t>Error due to variance</a:t>
-            </a:r>
-          </a:p>
-          <a:p>
-            <a:endParaRPr lang="nl-BE" sz="2400" dirty="0">
-              <a:latin typeface="Calibri" panose="020F0502020204030204" pitchFamily="34" charset="0"/>
-            </a:endParaRPr>
-          </a:p>
-          <a:p>
-            <a:r>
-              <a:rPr lang="nl-BE" sz="2400" dirty="0">
-                <a:latin typeface="Calibri" panose="020F0502020204030204" pitchFamily="34" charset="0"/>
-              </a:rPr>
-              <a:t>Irreducible error </a:t>
-            </a:r>
-            <a:endParaRPr lang="en-US" sz="2400" dirty="0">
-              <a:latin typeface="Calibri" panose="020F0502020204030204" pitchFamily="34" charset="0"/>
-            </a:endParaRPr>
-          </a:p>
-          <a:p>
-            <a:pPr marL="285750" indent="-285750">
-              <a:buFont typeface="Courier New" panose="02070309020205020404" pitchFamily="49" charset="0"/>
-              <a:buChar char="o"/>
-            </a:pPr>
-            <a:endParaRPr lang="en-US" dirty="0">
-              <a:latin typeface="Calibri" panose="020F0502020204030204" pitchFamily="34" charset="0"/>
-            </a:endParaRPr>
-          </a:p>
-        </p:txBody>
-      </p:sp>
-      <p:sp>
-        <p:nvSpPr>
-          <p:cNvPr id="4" name="TextBox 3">
-            <a:extLst>
-              <a:ext uri="{FF2B5EF4-FFF2-40B4-BE49-F238E27FC236}">
-                <a16:creationId xmlns:a16="http://schemas.microsoft.com/office/drawing/2014/main" id="{C5F47A19-F1CE-AE6F-E5F3-864B4EB25650}"/>
-              </a:ext>
-            </a:extLst>
-          </p:cNvPr>
-          <p:cNvSpPr txBox="1"/>
-          <p:nvPr/>
-        </p:nvSpPr>
-        <p:spPr>
-          <a:xfrm>
-            <a:off x="241301" y="129804"/>
-            <a:ext cx="11747500" cy="523220"/>
-          </a:xfrm>
-          <a:prstGeom prst="rect">
-            <a:avLst/>
-          </a:prstGeom>
-          <a:noFill/>
-        </p:spPr>
-        <p:txBody>
-          <a:bodyPr wrap="square" rtlCol="0">
-            <a:spAutoFit/>
-          </a:bodyPr>
-          <a:lstStyle/>
-          <a:p>
-            <a:r>
-              <a:rPr lang="en-US" sz="2800" dirty="0">
-                <a:latin typeface="+mj-lt"/>
-                <a:ea typeface="Lato" panose="020B0604020202020204" pitchFamily="34" charset="0"/>
-                <a:cs typeface="Helvetica" panose="020B0604020202020204" pitchFamily="34" charset="0"/>
-              </a:rPr>
-              <a:t>bias &lt;&gt; variance</a:t>
-            </a:r>
-            <a:endParaRPr lang="en-GB" sz="2800" dirty="0">
-              <a:latin typeface="+mj-lt"/>
-              <a:ea typeface="Lato" panose="020B0604020202020204" pitchFamily="34" charset="0"/>
-              <a:cs typeface="Helvetica" panose="020B0604020202020204" pitchFamily="34" charset="0"/>
-            </a:endParaRPr>
-          </a:p>
-        </p:txBody>
-      </p:sp>
-    </p:spTree>
-    <p:extLst>
-      <p:ext uri="{BB962C8B-B14F-4D97-AF65-F5344CB8AC3E}">
-        <p14:creationId xmlns:p14="http://schemas.microsoft.com/office/powerpoint/2010/main" val="2553046411"/>
-      </p:ext>
-    </p:extLst>
-  </p:cSld>
-  <p:clrMapOvr>
-    <a:masterClrMapping/>
-  </p:clrMapOvr>
-</p:sld>
-</file>
-
-<file path=ppt/slides/slide9.xml><?xml version="1.0" encoding="utf-8"?>
-<p:sld xmlns:a="http://schemas.openxmlformats.org/drawingml/2006/main" xmlns:r="http://schemas.openxmlformats.org/officeDocument/2006/relationships" xmlns:p="http://schemas.openxmlformats.org/presentationml/2006/main">
-  <p:cSld>
-    <p:spTree>
-      <p:nvGrpSpPr>
-        <p:cNvPr id="1" name=""/>
-        <p:cNvGrpSpPr/>
-        <p:nvPr/>
-      </p:nvGrpSpPr>
-      <p:grpSpPr>
-        <a:xfrm>
-          <a:off x="0" y="0"/>
-          <a:ext cx="0" cy="0"/>
-          <a:chOff x="0" y="0"/>
-          <a:chExt cx="0" cy="0"/>
-        </a:xfrm>
-      </p:grpSpPr>
-      <p:pic>
-        <p:nvPicPr>
-          <p:cNvPr id="6" name="Picture 2" descr="Related image">
-            <a:extLst>
-              <a:ext uri="{FF2B5EF4-FFF2-40B4-BE49-F238E27FC236}">
-                <a16:creationId xmlns:a16="http://schemas.microsoft.com/office/drawing/2014/main" id="{05CE624E-428B-4EEF-B623-B7958FFB9FA2}"/>
-              </a:ext>
-            </a:extLst>
-          </p:cNvPr>
-          <p:cNvPicPr>
-            <a:picLocks noChangeAspect="1" noChangeArrowheads="1"/>
-          </p:cNvPicPr>
-          <p:nvPr/>
-        </p:nvPicPr>
-        <p:blipFill>
-          <a:blip r:embed="rId3">
-            <a:extLst>
-              <a:ext uri="{28A0092B-C50C-407E-A947-70E740481C1C}">
-                <a14:useLocalDpi xmlns:a14="http://schemas.microsoft.com/office/drawing/2010/main" val="0"/>
-              </a:ext>
-            </a:extLst>
-          </a:blip>
-          <a:srcRect/>
-          <a:stretch>
-            <a:fillRect/>
-          </a:stretch>
-        </p:blipFill>
-        <p:spPr bwMode="auto">
-          <a:xfrm>
-            <a:off x="2002219" y="1133853"/>
-            <a:ext cx="6892593" cy="5251182"/>
-          </a:xfrm>
-          <a:prstGeom prst="rect">
-            <a:avLst/>
-          </a:prstGeom>
-          <a:noFill/>
-          <a:extLst>
-            <a:ext uri="{909E8E84-426E-40DD-AFC4-6F175D3DCCD1}">
-              <a14:hiddenFill xmlns:a14="http://schemas.microsoft.com/office/drawing/2010/main">
-                <a:solidFill>
-                  <a:srgbClr val="FFFFFF"/>
-                </a:solidFill>
-              </a14:hiddenFill>
-            </a:ext>
-          </a:extLst>
-        </p:spPr>
-      </p:pic>
-      <p:sp>
-        <p:nvSpPr>
-          <p:cNvPr id="4" name="Arrow: Right 3">
-            <a:extLst>
-              <a:ext uri="{FF2B5EF4-FFF2-40B4-BE49-F238E27FC236}">
-                <a16:creationId xmlns:a16="http://schemas.microsoft.com/office/drawing/2014/main" id="{46CC7FD9-370E-4A18-99A5-08AD5B7FFA93}"/>
-              </a:ext>
-            </a:extLst>
-          </p:cNvPr>
-          <p:cNvSpPr/>
-          <p:nvPr/>
-        </p:nvSpPr>
-        <p:spPr>
-          <a:xfrm rot="16200000">
-            <a:off x="4074546" y="3808214"/>
-            <a:ext cx="1679029" cy="400337"/>
-          </a:xfrm>
-          <a:prstGeom prst="rightArrow">
-            <a:avLst/>
-          </a:prstGeom>
-          <a:solidFill>
-            <a:schemeClr val="accent1">
-              <a:lumMod val="20000"/>
-              <a:lumOff val="80000"/>
-            </a:schemeClr>
-          </a:solidFill>
-        </p:spPr>
-        <p:style>
-          <a:lnRef idx="2">
-            <a:schemeClr val="accent1">
-              <a:shade val="50000"/>
-            </a:schemeClr>
-          </a:lnRef>
-          <a:fillRef idx="1">
-            <a:schemeClr val="accent1"/>
-          </a:fillRef>
-          <a:effectRef idx="0">
-            <a:schemeClr val="accent1"/>
-          </a:effectRef>
-          <a:fontRef idx="minor">
-            <a:schemeClr val="lt1"/>
-          </a:fontRef>
-        </p:style>
-        <p:txBody>
-          <a:bodyPr rtlCol="0" anchor="ctr"/>
-          <a:lstStyle/>
-          <a:p>
-            <a:pPr algn="ctr"/>
-            <a:endParaRPr lang="nl-BE" dirty="0"/>
-          </a:p>
-        </p:txBody>
-      </p:sp>
-      <p:sp>
-        <p:nvSpPr>
-          <p:cNvPr id="8" name="Arrow: Right 7">
-            <a:extLst>
-              <a:ext uri="{FF2B5EF4-FFF2-40B4-BE49-F238E27FC236}">
-                <a16:creationId xmlns:a16="http://schemas.microsoft.com/office/drawing/2014/main" id="{B04A7BC4-D9C3-4283-AEF0-AC8E83FF44A2}"/>
-              </a:ext>
-            </a:extLst>
-          </p:cNvPr>
-          <p:cNvSpPr/>
-          <p:nvPr/>
-        </p:nvSpPr>
-        <p:spPr>
-          <a:xfrm rot="10800000">
-            <a:off x="5535484" y="2707256"/>
-            <a:ext cx="1679029" cy="400337"/>
-          </a:xfrm>
-          <a:prstGeom prst="rightArrow">
-            <a:avLst/>
-          </a:prstGeom>
-          <a:solidFill>
-            <a:schemeClr val="accent1">
-              <a:lumMod val="20000"/>
-              <a:lumOff val="80000"/>
-            </a:schemeClr>
-          </a:solidFill>
-        </p:spPr>
-        <p:style>
-          <a:lnRef idx="2">
-            <a:schemeClr val="accent1">
-              <a:shade val="50000"/>
-            </a:schemeClr>
-          </a:lnRef>
-          <a:fillRef idx="1">
-            <a:schemeClr val="accent1"/>
-          </a:fillRef>
-          <a:effectRef idx="0">
-            <a:schemeClr val="accent1"/>
-          </a:effectRef>
-          <a:fontRef idx="minor">
-            <a:schemeClr val="lt1"/>
-          </a:fontRef>
-        </p:style>
-        <p:txBody>
-          <a:bodyPr rtlCol="0" anchor="ctr"/>
-          <a:lstStyle/>
-          <a:p>
-            <a:pPr algn="ctr"/>
-            <a:endParaRPr lang="nl-BE"/>
-          </a:p>
-        </p:txBody>
-      </p:sp>
-      <p:sp>
-        <p:nvSpPr>
-          <p:cNvPr id="12" name="TextBox 11">
-            <a:extLst>
-              <a:ext uri="{FF2B5EF4-FFF2-40B4-BE49-F238E27FC236}">
-                <a16:creationId xmlns:a16="http://schemas.microsoft.com/office/drawing/2014/main" id="{225EAFEC-505F-40C0-AE44-A1698E0909D4}"/>
-              </a:ext>
-            </a:extLst>
-          </p:cNvPr>
-          <p:cNvSpPr txBox="1"/>
-          <p:nvPr/>
-        </p:nvSpPr>
-        <p:spPr>
-          <a:xfrm>
-            <a:off x="4390697" y="3759444"/>
-            <a:ext cx="1797269" cy="461665"/>
-          </a:xfrm>
-          <a:prstGeom prst="rect">
-            <a:avLst/>
-          </a:prstGeom>
-          <a:noFill/>
-        </p:spPr>
-        <p:txBody>
-          <a:bodyPr wrap="square" rtlCol="0">
-            <a:spAutoFit/>
-          </a:bodyPr>
-          <a:lstStyle/>
-          <a:p>
-            <a:r>
-              <a:rPr lang="nl-BE" sz="2400" dirty="0"/>
-              <a:t>bagging</a:t>
-            </a:r>
-          </a:p>
-        </p:txBody>
-      </p:sp>
-      <p:sp>
-        <p:nvSpPr>
-          <p:cNvPr id="13" name="TextBox 12">
-            <a:extLst>
-              <a:ext uri="{FF2B5EF4-FFF2-40B4-BE49-F238E27FC236}">
-                <a16:creationId xmlns:a16="http://schemas.microsoft.com/office/drawing/2014/main" id="{5FD9E6B6-2390-4BE6-AF89-C4B9B110FCAF}"/>
-              </a:ext>
-            </a:extLst>
-          </p:cNvPr>
-          <p:cNvSpPr txBox="1"/>
-          <p:nvPr/>
-        </p:nvSpPr>
-        <p:spPr>
-          <a:xfrm>
-            <a:off x="5741277" y="2645928"/>
-            <a:ext cx="1797269" cy="461665"/>
-          </a:xfrm>
-          <a:prstGeom prst="rect">
-            <a:avLst/>
-          </a:prstGeom>
-          <a:noFill/>
-        </p:spPr>
-        <p:txBody>
-          <a:bodyPr wrap="square" rtlCol="0">
-            <a:spAutoFit/>
-          </a:bodyPr>
-          <a:lstStyle/>
-          <a:p>
-            <a:r>
-              <a:rPr lang="nl-BE" sz="2400" dirty="0"/>
-              <a:t>boosting</a:t>
-            </a:r>
-          </a:p>
-        </p:txBody>
-      </p:sp>
-      <p:sp>
-        <p:nvSpPr>
-          <p:cNvPr id="3" name="TextBox 2">
-            <a:extLst>
-              <a:ext uri="{FF2B5EF4-FFF2-40B4-BE49-F238E27FC236}">
-                <a16:creationId xmlns:a16="http://schemas.microsoft.com/office/drawing/2014/main" id="{5FF1FDA0-20F2-FF74-FD4B-21B1B82F32A5}"/>
-              </a:ext>
-            </a:extLst>
-          </p:cNvPr>
-          <p:cNvSpPr txBox="1"/>
-          <p:nvPr/>
-        </p:nvSpPr>
-        <p:spPr>
-          <a:xfrm>
-            <a:off x="241301" y="129804"/>
-            <a:ext cx="11747500" cy="523220"/>
-          </a:xfrm>
-          <a:prstGeom prst="rect">
-            <a:avLst/>
-          </a:prstGeom>
-          <a:noFill/>
-        </p:spPr>
-        <p:txBody>
-          <a:bodyPr wrap="square" rtlCol="0">
-            <a:spAutoFit/>
-          </a:bodyPr>
-          <a:lstStyle/>
-          <a:p>
-            <a:r>
-              <a:rPr lang="en-US" sz="2800" dirty="0">
-                <a:latin typeface="+mj-lt"/>
-                <a:ea typeface="Lato" panose="020B0604020202020204" pitchFamily="34" charset="0"/>
-                <a:cs typeface="Helvetica" panose="020B0604020202020204" pitchFamily="34" charset="0"/>
-              </a:rPr>
-              <a:t>bagging &lt;&gt; boosting</a:t>
-            </a:r>
-            <a:endParaRPr lang="en-GB" sz="2800" dirty="0">
-              <a:latin typeface="+mj-lt"/>
-              <a:ea typeface="Lato" panose="020B0604020202020204" pitchFamily="34" charset="0"/>
-              <a:cs typeface="Helvetica" panose="020B0604020202020204" pitchFamily="34" charset="0"/>
-            </a:endParaRPr>
-          </a:p>
-        </p:txBody>
-      </p:sp>
-    </p:spTree>
-    <p:extLst>
-      <p:ext uri="{BB962C8B-B14F-4D97-AF65-F5344CB8AC3E}">
-        <p14:creationId xmlns:p14="http://schemas.microsoft.com/office/powerpoint/2010/main" val="3125656099"/>
       </p:ext>
     </p:extLst>
   </p:cSld>
